--- a/03_Evaluation/slides/3_3_ensemble_learning.pptx
+++ b/03_Evaluation/slides/3_3_ensemble_learning.pptx
@@ -134,49 +134,277 @@
 </p:presentation>
 </file>
 
+<file path=ppt/revisionInfo.xml><?xml version="1.0" encoding="utf-8"?>
+<p1510:revInfo xmlns:a="http://schemas.openxmlformats.org/drawingml/2006/main" xmlns:r="http://schemas.openxmlformats.org/officeDocument/2006/relationships" xmlns:p1510="http://schemas.microsoft.com/office/powerpoint/2015/10/main">
+  <p1510:revLst>
+    <p1510:client id="{14D84EC8-78AF-4B7A-9551-65D3E3EAE741}" v="3" dt="2026-10-22T08:03:05.372"/>
+  </p1510:revLst>
+</p1510:revInfo>
+</file>
+
 <file path=ppt/changesInfos/changesInfo1.xml><?xml version="1.0" encoding="utf-8"?>
 <pc:chgInfo xmlns:a="http://schemas.openxmlformats.org/drawingml/2006/main" xmlns:r="http://schemas.openxmlformats.org/officeDocument/2006/relationships" xmlns:ac="http://schemas.microsoft.com/office/drawing/2013/main/command" xmlns:pc="http://schemas.microsoft.com/office/powerpoint/2013/main/command">
   <pc:docChgLst>
     <pc:chgData name="Robbin Bouwmeester" userId="1dbfebabfc25a55a" providerId="LiveId" clId="{75D63595-F797-482E-A4A0-2F4889B74D4F}"/>
-    <pc:docChg chg="custSel addSld delSld modSld sldOrd">
-      <pc:chgData name="Robbin Bouwmeester" userId="1dbfebabfc25a55a" providerId="LiveId" clId="{75D63595-F797-482E-A4A0-2F4889B74D4F}" dt="2026-10-18T08:13:31.066" v="120" actId="47"/>
+    <pc:docChg chg="undo custSel addSld delSld modSld sldOrd">
+      <pc:chgData name="Robbin Bouwmeester" userId="1dbfebabfc25a55a" providerId="LiveId" clId="{75D63595-F797-482E-A4A0-2F4889B74D4F}" dt="2026-10-22T08:05:01.842" v="864" actId="20577"/>
       <pc:docMkLst>
         <pc:docMk/>
       </pc:docMkLst>
-      <pc:sldChg chg="delSp add del mod ord modShow">
-        <pc:chgData name="Robbin Bouwmeester" userId="1dbfebabfc25a55a" providerId="LiveId" clId="{75D63595-F797-482E-A4A0-2F4889B74D4F}" dt="2026-10-18T08:13:31.066" v="120" actId="47"/>
+      <pc:sldChg chg="modSp mod">
+        <pc:chgData name="Robbin Bouwmeester" userId="1dbfebabfc25a55a" providerId="LiveId" clId="{75D63595-F797-482E-A4A0-2F4889B74D4F}" dt="2026-10-22T07:26:06.514" v="199" actId="20577"/>
         <pc:sldMkLst>
           <pc:docMk/>
-          <pc:sldMk cId="419804066" sldId="558"/>
+          <pc:sldMk cId="4071848948" sldId="257"/>
         </pc:sldMkLst>
+        <pc:spChg chg="mod">
+          <ac:chgData name="Robbin Bouwmeester" userId="1dbfebabfc25a55a" providerId="LiveId" clId="{75D63595-F797-482E-A4A0-2F4889B74D4F}" dt="2026-10-22T07:26:06.514" v="199" actId="20577"/>
+          <ac:spMkLst>
+            <pc:docMk/>
+            <pc:sldMk cId="4071848948" sldId="257"/>
+            <ac:spMk id="5" creationId="{0E2CB1A6-46E1-FE3F-5EB3-4EDF592FBD9E}"/>
+          </ac:spMkLst>
+        </pc:spChg>
       </pc:sldChg>
-      <pc:sldChg chg="delSp add del mod ord modShow">
-        <pc:chgData name="Robbin Bouwmeester" userId="1dbfebabfc25a55a" providerId="LiveId" clId="{75D63595-F797-482E-A4A0-2F4889B74D4F}" dt="2026-10-18T08:13:31.066" v="120" actId="47"/>
+      <pc:sldChg chg="modSp">
+        <pc:chgData name="Robbin Bouwmeester" userId="1dbfebabfc25a55a" providerId="LiveId" clId="{75D63595-F797-482E-A4A0-2F4889B74D4F}" dt="2026-10-22T08:01:25.516" v="597"/>
         <pc:sldMkLst>
           <pc:docMk/>
-          <pc:sldMk cId="3516859904" sldId="559"/>
+          <pc:sldMk cId="2553046411" sldId="261"/>
         </pc:sldMkLst>
+        <pc:spChg chg="mod">
+          <ac:chgData name="Robbin Bouwmeester" userId="1dbfebabfc25a55a" providerId="LiveId" clId="{75D63595-F797-482E-A4A0-2F4889B74D4F}" dt="2026-10-22T08:01:25.516" v="597"/>
+          <ac:spMkLst>
+            <pc:docMk/>
+            <pc:sldMk cId="2553046411" sldId="261"/>
+            <ac:spMk id="4" creationId="{C5F47A19-F1CE-AE6F-E5F3-864B4EB25650}"/>
+          </ac:spMkLst>
+        </pc:spChg>
       </pc:sldChg>
-      <pc:sldChg chg="delSp add del mod ord modShow">
-        <pc:chgData name="Robbin Bouwmeester" userId="1dbfebabfc25a55a" providerId="LiveId" clId="{75D63595-F797-482E-A4A0-2F4889B74D4F}" dt="2026-10-18T08:13:31.066" v="120" actId="47"/>
+      <pc:sldChg chg="modSp mod">
+        <pc:chgData name="Robbin Bouwmeester" userId="1dbfebabfc25a55a" providerId="LiveId" clId="{75D63595-F797-482E-A4A0-2F4889B74D4F}" dt="2026-10-22T08:02:02.185" v="687" actId="255"/>
         <pc:sldMkLst>
           <pc:docMk/>
-          <pc:sldMk cId="1745475178" sldId="560"/>
+          <pc:sldMk cId="3125656099" sldId="262"/>
         </pc:sldMkLst>
+        <pc:spChg chg="mod">
+          <ac:chgData name="Robbin Bouwmeester" userId="1dbfebabfc25a55a" providerId="LiveId" clId="{75D63595-F797-482E-A4A0-2F4889B74D4F}" dt="2026-10-22T08:02:02.185" v="687" actId="255"/>
+          <ac:spMkLst>
+            <pc:docMk/>
+            <pc:sldMk cId="3125656099" sldId="262"/>
+            <ac:spMk id="3" creationId="{5FF1FDA0-20F2-FF74-FD4B-21B1B82F32A5}"/>
+          </ac:spMkLst>
+        </pc:spChg>
       </pc:sldChg>
-      <pc:sldChg chg="delSp add del mod ord modShow">
-        <pc:chgData name="Robbin Bouwmeester" userId="1dbfebabfc25a55a" providerId="LiveId" clId="{75D63595-F797-482E-A4A0-2F4889B74D4F}" dt="2026-10-18T08:13:31.066" v="120" actId="47"/>
+      <pc:sldChg chg="modSp mod">
+        <pc:chgData name="Robbin Bouwmeester" userId="1dbfebabfc25a55a" providerId="LiveId" clId="{75D63595-F797-482E-A4A0-2F4889B74D4F}" dt="2026-10-22T08:02:56.435" v="789" actId="113"/>
         <pc:sldMkLst>
           <pc:docMk/>
-          <pc:sldMk cId="1820715527" sldId="561"/>
+          <pc:sldMk cId="2039997518" sldId="263"/>
         </pc:sldMkLst>
+        <pc:spChg chg="mod">
+          <ac:chgData name="Robbin Bouwmeester" userId="1dbfebabfc25a55a" providerId="LiveId" clId="{75D63595-F797-482E-A4A0-2F4889B74D4F}" dt="2026-10-22T08:02:56.435" v="789" actId="113"/>
+          <ac:spMkLst>
+            <pc:docMk/>
+            <pc:sldMk cId="2039997518" sldId="263"/>
+            <ac:spMk id="3" creationId="{601EFCC3-E053-4D11-0B65-292DD2846A6C}"/>
+          </ac:spMkLst>
+        </pc:spChg>
       </pc:sldChg>
-      <pc:sldChg chg="addSp modSp new del mod modShow">
-        <pc:chgData name="Robbin Bouwmeester" userId="1dbfebabfc25a55a" providerId="LiveId" clId="{75D63595-F797-482E-A4A0-2F4889B74D4F}" dt="2026-10-18T08:13:31.066" v="120" actId="47"/>
+      <pc:sldChg chg="modSp mod">
+        <pc:chgData name="Robbin Bouwmeester" userId="1dbfebabfc25a55a" providerId="LiveId" clId="{75D63595-F797-482E-A4A0-2F4889B74D4F}" dt="2026-10-22T08:04:02.674" v="849" actId="255"/>
         <pc:sldMkLst>
           <pc:docMk/>
-          <pc:sldMk cId="3436499605" sldId="563"/>
+          <pc:sldMk cId="1423335593" sldId="264"/>
         </pc:sldMkLst>
+        <pc:spChg chg="mod">
+          <ac:chgData name="Robbin Bouwmeester" userId="1dbfebabfc25a55a" providerId="LiveId" clId="{75D63595-F797-482E-A4A0-2F4889B74D4F}" dt="2026-10-22T08:04:02.674" v="849" actId="255"/>
+          <ac:spMkLst>
+            <pc:docMk/>
+            <pc:sldMk cId="1423335593" sldId="264"/>
+            <ac:spMk id="3" creationId="{6ED126C6-BF52-3888-05E1-434D84BD3C9A}"/>
+          </ac:spMkLst>
+        </pc:spChg>
+      </pc:sldChg>
+      <pc:sldChg chg="modSp mod">
+        <pc:chgData name="Robbin Bouwmeester" userId="1dbfebabfc25a55a" providerId="LiveId" clId="{75D63595-F797-482E-A4A0-2F4889B74D4F}" dt="2026-10-22T08:04:37.395" v="854" actId="113"/>
+        <pc:sldMkLst>
+          <pc:docMk/>
+          <pc:sldMk cId="3549390794" sldId="265"/>
+        </pc:sldMkLst>
+        <pc:spChg chg="mod">
+          <ac:chgData name="Robbin Bouwmeester" userId="1dbfebabfc25a55a" providerId="LiveId" clId="{75D63595-F797-482E-A4A0-2F4889B74D4F}" dt="2026-10-22T08:04:37.395" v="854" actId="113"/>
+          <ac:spMkLst>
+            <pc:docMk/>
+            <pc:sldMk cId="3549390794" sldId="265"/>
+            <ac:spMk id="4" creationId="{7AD5F254-81F9-CD11-65A8-2A12C0406247}"/>
+          </ac:spMkLst>
+        </pc:spChg>
+      </pc:sldChg>
+      <pc:sldChg chg="modSp mod">
+        <pc:chgData name="Robbin Bouwmeester" userId="1dbfebabfc25a55a" providerId="LiveId" clId="{75D63595-F797-482E-A4A0-2F4889B74D4F}" dt="2026-10-22T08:03:40.776" v="844" actId="255"/>
+        <pc:sldMkLst>
+          <pc:docMk/>
+          <pc:sldMk cId="4121994623" sldId="266"/>
+        </pc:sldMkLst>
+        <pc:spChg chg="mod">
+          <ac:chgData name="Robbin Bouwmeester" userId="1dbfebabfc25a55a" providerId="LiveId" clId="{75D63595-F797-482E-A4A0-2F4889B74D4F}" dt="2026-10-22T08:03:40.776" v="844" actId="255"/>
+          <ac:spMkLst>
+            <pc:docMk/>
+            <pc:sldMk cId="4121994623" sldId="266"/>
+            <ac:spMk id="3" creationId="{3EE2CA07-2C35-F83A-E2DD-2AD4C7A96593}"/>
+          </ac:spMkLst>
+        </pc:spChg>
+      </pc:sldChg>
+      <pc:sldChg chg="modSp mod">
+        <pc:chgData name="Robbin Bouwmeester" userId="1dbfebabfc25a55a" providerId="LiveId" clId="{75D63595-F797-482E-A4A0-2F4889B74D4F}" dt="2026-10-22T08:04:50.684" v="859" actId="2711"/>
+        <pc:sldMkLst>
+          <pc:docMk/>
+          <pc:sldMk cId="3449462475" sldId="270"/>
+        </pc:sldMkLst>
+        <pc:spChg chg="mod">
+          <ac:chgData name="Robbin Bouwmeester" userId="1dbfebabfc25a55a" providerId="LiveId" clId="{75D63595-F797-482E-A4A0-2F4889B74D4F}" dt="2026-10-22T08:04:50.684" v="859" actId="2711"/>
+          <ac:spMkLst>
+            <pc:docMk/>
+            <pc:sldMk cId="3449462475" sldId="270"/>
+            <ac:spMk id="3" creationId="{3B19C350-F358-21B9-E1FA-A4ABA8DA6F2B}"/>
+          </ac:spMkLst>
+        </pc:spChg>
+      </pc:sldChg>
+      <pc:sldChg chg="modSp mod">
+        <pc:chgData name="Robbin Bouwmeester" userId="1dbfebabfc25a55a" providerId="LiveId" clId="{75D63595-F797-482E-A4A0-2F4889B74D4F}" dt="2026-10-22T08:05:01.842" v="864" actId="20577"/>
+        <pc:sldMkLst>
+          <pc:docMk/>
+          <pc:sldMk cId="1548010638" sldId="272"/>
+        </pc:sldMkLst>
+        <pc:spChg chg="mod">
+          <ac:chgData name="Robbin Bouwmeester" userId="1dbfebabfc25a55a" providerId="LiveId" clId="{75D63595-F797-482E-A4A0-2F4889B74D4F}" dt="2026-10-22T08:05:01.842" v="864" actId="20577"/>
+          <ac:spMkLst>
+            <pc:docMk/>
+            <pc:sldMk cId="1548010638" sldId="272"/>
+            <ac:spMk id="3" creationId="{4B87DC9D-53B6-0167-04FA-661E59C2D835}"/>
+          </ac:spMkLst>
+        </pc:spChg>
+      </pc:sldChg>
+      <pc:sldChg chg="modSp mod">
+        <pc:chgData name="Robbin Bouwmeester" userId="1dbfebabfc25a55a" providerId="LiveId" clId="{75D63595-F797-482E-A4A0-2F4889B74D4F}" dt="2026-10-22T07:27:50.447" v="371" actId="255"/>
+        <pc:sldMkLst>
+          <pc:docMk/>
+          <pc:sldMk cId="1442676706" sldId="273"/>
+        </pc:sldMkLst>
+        <pc:spChg chg="mod">
+          <ac:chgData name="Robbin Bouwmeester" userId="1dbfebabfc25a55a" providerId="LiveId" clId="{75D63595-F797-482E-A4A0-2F4889B74D4F}" dt="2026-10-22T07:27:50.447" v="371" actId="255"/>
+          <ac:spMkLst>
+            <pc:docMk/>
+            <pc:sldMk cId="1442676706" sldId="273"/>
+            <ac:spMk id="4" creationId="{61CBF3B4-3D25-A8D2-9AFA-2BAA3D38C33F}"/>
+          </ac:spMkLst>
+        </pc:spChg>
+      </pc:sldChg>
+      <pc:sldChg chg="modSp mod">
+        <pc:chgData name="Robbin Bouwmeester" userId="1dbfebabfc25a55a" providerId="LiveId" clId="{75D63595-F797-482E-A4A0-2F4889B74D4F}" dt="2026-10-22T07:59:57.193" v="434" actId="255"/>
+        <pc:sldMkLst>
+          <pc:docMk/>
+          <pc:sldMk cId="416481786" sldId="275"/>
+        </pc:sldMkLst>
+        <pc:spChg chg="mod">
+          <ac:chgData name="Robbin Bouwmeester" userId="1dbfebabfc25a55a" providerId="LiveId" clId="{75D63595-F797-482E-A4A0-2F4889B74D4F}" dt="2026-10-22T07:59:57.193" v="434" actId="255"/>
+          <ac:spMkLst>
+            <pc:docMk/>
+            <pc:sldMk cId="416481786" sldId="275"/>
+            <ac:spMk id="4" creationId="{61CBF3B4-3D25-A8D2-9AFA-2BAA3D38C33F}"/>
+          </ac:spMkLst>
+        </pc:spChg>
+      </pc:sldChg>
+      <pc:sldChg chg="modSp mod">
+        <pc:chgData name="Robbin Bouwmeester" userId="1dbfebabfc25a55a" providerId="LiveId" clId="{75D63595-F797-482E-A4A0-2F4889B74D4F}" dt="2026-10-22T08:00:36.323" v="501" actId="255"/>
+        <pc:sldMkLst>
+          <pc:docMk/>
+          <pc:sldMk cId="559918975" sldId="276"/>
+        </pc:sldMkLst>
+        <pc:spChg chg="mod">
+          <ac:chgData name="Robbin Bouwmeester" userId="1dbfebabfc25a55a" providerId="LiveId" clId="{75D63595-F797-482E-A4A0-2F4889B74D4F}" dt="2026-10-22T08:00:36.323" v="501" actId="255"/>
+          <ac:spMkLst>
+            <pc:docMk/>
+            <pc:sldMk cId="559918975" sldId="276"/>
+            <ac:spMk id="4" creationId="{5DAFD78D-D39C-76AC-2A82-A046D751AC06}"/>
+          </ac:spMkLst>
+        </pc:spChg>
+      </pc:sldChg>
+      <pc:sldChg chg="modSp mod">
+        <pc:chgData name="Robbin Bouwmeester" userId="1dbfebabfc25a55a" providerId="LiveId" clId="{75D63595-F797-482E-A4A0-2F4889B74D4F}" dt="2026-10-22T07:37:28.724" v="380" actId="255"/>
+        <pc:sldMkLst>
+          <pc:docMk/>
+          <pc:sldMk cId="4146636672" sldId="277"/>
+        </pc:sldMkLst>
+        <pc:spChg chg="mod">
+          <ac:chgData name="Robbin Bouwmeester" userId="1dbfebabfc25a55a" providerId="LiveId" clId="{75D63595-F797-482E-A4A0-2F4889B74D4F}" dt="2026-10-22T07:37:28.724" v="380" actId="255"/>
+          <ac:spMkLst>
+            <pc:docMk/>
+            <pc:sldMk cId="4146636672" sldId="277"/>
+            <ac:spMk id="5" creationId="{0C69F2B5-76E4-E544-9063-3A41B6136987}"/>
+          </ac:spMkLst>
+        </pc:spChg>
+      </pc:sldChg>
+      <pc:sldChg chg="modSp mod">
+        <pc:chgData name="Robbin Bouwmeester" userId="1dbfebabfc25a55a" providerId="LiveId" clId="{75D63595-F797-482E-A4A0-2F4889B74D4F}" dt="2026-10-22T08:01:18.286" v="596" actId="2711"/>
+        <pc:sldMkLst>
+          <pc:docMk/>
+          <pc:sldMk cId="4034051223" sldId="278"/>
+        </pc:sldMkLst>
+        <pc:spChg chg="mod">
+          <ac:chgData name="Robbin Bouwmeester" userId="1dbfebabfc25a55a" providerId="LiveId" clId="{75D63595-F797-482E-A4A0-2F4889B74D4F}" dt="2026-10-22T08:01:18.286" v="596" actId="2711"/>
+          <ac:spMkLst>
+            <pc:docMk/>
+            <pc:sldMk cId="4034051223" sldId="278"/>
+            <ac:spMk id="2" creationId="{76DBF4D3-3E4E-965E-1E3A-DA46F42CD933}"/>
+          </ac:spMkLst>
+        </pc:spChg>
+      </pc:sldChg>
+      <pc:sldChg chg="modSp mod">
+        <pc:chgData name="Robbin Bouwmeester" userId="1dbfebabfc25a55a" providerId="LiveId" clId="{75D63595-F797-482E-A4A0-2F4889B74D4F}" dt="2026-10-22T07:25:22.005" v="184" actId="113"/>
+        <pc:sldMkLst>
+          <pc:docMk/>
+          <pc:sldMk cId="3754802310" sldId="544"/>
+        </pc:sldMkLst>
+        <pc:spChg chg="mod">
+          <ac:chgData name="Robbin Bouwmeester" userId="1dbfebabfc25a55a" providerId="LiveId" clId="{75D63595-F797-482E-A4A0-2F4889B74D4F}" dt="2026-10-22T07:25:22.005" v="184" actId="113"/>
+          <ac:spMkLst>
+            <pc:docMk/>
+            <pc:sldMk cId="3754802310" sldId="544"/>
+            <ac:spMk id="5" creationId="{F6487672-A4DC-A86C-D42B-E9A23FB90054}"/>
+          </ac:spMkLst>
+        </pc:spChg>
+      </pc:sldChg>
+      <pc:sldChg chg="modSp mod">
+        <pc:chgData name="Robbin Bouwmeester" userId="1dbfebabfc25a55a" providerId="LiveId" clId="{75D63595-F797-482E-A4A0-2F4889B74D4F}" dt="2026-10-22T07:26:50.068" v="280" actId="20577"/>
+        <pc:sldMkLst>
+          <pc:docMk/>
+          <pc:sldMk cId="3679395829" sldId="545"/>
+        </pc:sldMkLst>
+        <pc:spChg chg="mod">
+          <ac:chgData name="Robbin Bouwmeester" userId="1dbfebabfc25a55a" providerId="LiveId" clId="{75D63595-F797-482E-A4A0-2F4889B74D4F}" dt="2026-10-22T07:26:50.068" v="280" actId="20577"/>
+          <ac:spMkLst>
+            <pc:docMk/>
+            <pc:sldMk cId="3679395829" sldId="545"/>
+            <ac:spMk id="4" creationId="{61CBF3B4-3D25-A8D2-9AFA-2BAA3D38C33F}"/>
+          </ac:spMkLst>
+        </pc:spChg>
+      </pc:sldChg>
+      <pc:sldChg chg="modSp mod">
+        <pc:chgData name="Robbin Bouwmeester" userId="1dbfebabfc25a55a" providerId="LiveId" clId="{75D63595-F797-482E-A4A0-2F4889B74D4F}" dt="2026-10-22T07:37:41.636" v="383" actId="255"/>
+        <pc:sldMkLst>
+          <pc:docMk/>
+          <pc:sldMk cId="3531563971" sldId="562"/>
+        </pc:sldMkLst>
+        <pc:spChg chg="mod">
+          <ac:chgData name="Robbin Bouwmeester" userId="1dbfebabfc25a55a" providerId="LiveId" clId="{75D63595-F797-482E-A4A0-2F4889B74D4F}" dt="2026-10-22T07:37:41.636" v="383" actId="255"/>
+          <ac:spMkLst>
+            <pc:docMk/>
+            <pc:sldMk cId="3531563971" sldId="562"/>
+            <ac:spMk id="4" creationId="{E1417B48-0775-F429-4CD0-ED16DA297E73}"/>
+          </ac:spMkLst>
+        </pc:spChg>
       </pc:sldChg>
     </pc:docChg>
   </pc:docChgLst>
@@ -265,7 +493,7 @@
           <a:p>
             <a:fld id="{3C10CED3-9D38-496E-A0C9-F8629E5A2A41}" type="datetimeFigureOut">
               <a:rPr lang="en-US" smtClean="0"/>
-              <a:t>10/18/2026</a:t>
+              <a:t>10/22/2026</a:t>
             </a:fld>
             <a:endParaRPr lang="en-US"/>
           </a:p>
@@ -430,7 +658,7 @@
           <a:p>
             <a:fld id="{566A7747-0984-4E12-9222-F6AC1BF9321E}" type="datetimeFigureOut">
               <a:rPr lang="en-US" smtClean="0"/>
-              <a:t>10/18/2026</a:t>
+              <a:t>10/20/2026</a:t>
             </a:fld>
             <a:endParaRPr lang="en-US"/>
           </a:p>
@@ -870,6 +1098,90 @@
           <a:p>
             <a:fld id="{E36C4827-840E-4EC5-B0B2-4EAAD02724FF}" type="slidenum">
               <a:rPr lang="en-US" smtClean="0"/>
+              <a:t>15</a:t>
+            </a:fld>
+            <a:endParaRPr lang="en-US"/>
+          </a:p>
+        </p:txBody>
+      </p:sp>
+    </p:spTree>
+    <p:extLst>
+      <p:ext uri="{BB962C8B-B14F-4D97-AF65-F5344CB8AC3E}">
+        <p14:creationId xmlns:p14="http://schemas.microsoft.com/office/powerpoint/2010/main" val="1377911668"/>
+      </p:ext>
+    </p:extLst>
+  </p:cSld>
+  <p:clrMapOvr>
+    <a:masterClrMapping/>
+  </p:clrMapOvr>
+</p:notes>
+</file>
+
+<file path=ppt/notesSlides/notesSlide11.xml><?xml version="1.0" encoding="utf-8"?>
+<p:notes xmlns:a="http://schemas.openxmlformats.org/drawingml/2006/main" xmlns:r="http://schemas.openxmlformats.org/officeDocument/2006/relationships" xmlns:p="http://schemas.openxmlformats.org/presentationml/2006/main">
+  <p:cSld>
+    <p:spTree>
+      <p:nvGrpSpPr>
+        <p:cNvPr id="1" name=""/>
+        <p:cNvGrpSpPr/>
+        <p:nvPr/>
+      </p:nvGrpSpPr>
+      <p:grpSpPr>
+        <a:xfrm>
+          <a:off x="0" y="0"/>
+          <a:ext cx="0" cy="0"/>
+          <a:chOff x="0" y="0"/>
+          <a:chExt cx="0" cy="0"/>
+        </a:xfrm>
+      </p:grpSpPr>
+      <p:sp>
+        <p:nvSpPr>
+          <p:cNvPr id="2" name="Slide Image Placeholder 1"/>
+          <p:cNvSpPr>
+            <a:spLocks noGrp="1" noRot="1" noChangeAspect="1"/>
+          </p:cNvSpPr>
+          <p:nvPr>
+            <p:ph type="sldImg"/>
+          </p:nvPr>
+        </p:nvSpPr>
+        <p:spPr/>
+      </p:sp>
+      <p:sp>
+        <p:nvSpPr>
+          <p:cNvPr id="3" name="Notes Placeholder 2"/>
+          <p:cNvSpPr>
+            <a:spLocks noGrp="1"/>
+          </p:cNvSpPr>
+          <p:nvPr>
+            <p:ph type="body" idx="1"/>
+          </p:nvPr>
+        </p:nvSpPr>
+        <p:spPr/>
+        <p:txBody>
+          <a:bodyPr/>
+          <a:lstStyle/>
+          <a:p>
+            <a:endParaRPr lang="en-US" dirty="0"/>
+          </a:p>
+        </p:txBody>
+      </p:sp>
+      <p:sp>
+        <p:nvSpPr>
+          <p:cNvPr id="4" name="Slide Number Placeholder 3"/>
+          <p:cNvSpPr>
+            <a:spLocks noGrp="1"/>
+          </p:cNvSpPr>
+          <p:nvPr>
+            <p:ph type="sldNum" sz="quarter" idx="10"/>
+          </p:nvPr>
+        </p:nvSpPr>
+        <p:spPr/>
+        <p:txBody>
+          <a:bodyPr/>
+          <a:lstStyle/>
+          <a:p>
+            <a:fld id="{E36C4827-840E-4EC5-B0B2-4EAAD02724FF}" type="slidenum">
+              <a:rPr lang="en-US" smtClean="0"/>
               <a:t>16</a:t>
             </a:fld>
             <a:endParaRPr lang="en-US"/>
@@ -889,7 +1201,7 @@
 </p:notes>
 </file>
 
-<file path=ppt/notesSlides/notesSlide11.xml><?xml version="1.0" encoding="utf-8"?>
+<file path=ppt/notesSlides/notesSlide12.xml><?xml version="1.0" encoding="utf-8"?>
 <p:notes xmlns:a="http://schemas.openxmlformats.org/drawingml/2006/main" xmlns:r="http://schemas.openxmlformats.org/officeDocument/2006/relationships" xmlns:p="http://schemas.openxmlformats.org/presentationml/2006/main">
   <p:cSld>
     <p:spTree>
@@ -1062,6 +1374,90 @@
   <p:cSld>
     <p:spTree>
       <p:nvGrpSpPr>
+        <p:cNvPr id="1" name=""/>
+        <p:cNvGrpSpPr/>
+        <p:nvPr/>
+      </p:nvGrpSpPr>
+      <p:grpSpPr>
+        <a:xfrm>
+          <a:off x="0" y="0"/>
+          <a:ext cx="0" cy="0"/>
+          <a:chOff x="0" y="0"/>
+          <a:chExt cx="0" cy="0"/>
+        </a:xfrm>
+      </p:grpSpPr>
+      <p:sp>
+        <p:nvSpPr>
+          <p:cNvPr id="2" name="Slide Image Placeholder 1"/>
+          <p:cNvSpPr>
+            <a:spLocks noGrp="1" noRot="1" noChangeAspect="1"/>
+          </p:cNvSpPr>
+          <p:nvPr>
+            <p:ph type="sldImg"/>
+          </p:nvPr>
+        </p:nvSpPr>
+        <p:spPr/>
+      </p:sp>
+      <p:sp>
+        <p:nvSpPr>
+          <p:cNvPr id="3" name="Notes Placeholder 2"/>
+          <p:cNvSpPr>
+            <a:spLocks noGrp="1"/>
+          </p:cNvSpPr>
+          <p:nvPr>
+            <p:ph type="body" idx="1"/>
+          </p:nvPr>
+        </p:nvSpPr>
+        <p:spPr/>
+        <p:txBody>
+          <a:bodyPr/>
+          <a:lstStyle/>
+          <a:p>
+            <a:endParaRPr lang="en-NL" dirty="0"/>
+          </a:p>
+        </p:txBody>
+      </p:sp>
+      <p:sp>
+        <p:nvSpPr>
+          <p:cNvPr id="4" name="Slide Number Placeholder 3"/>
+          <p:cNvSpPr>
+            <a:spLocks noGrp="1"/>
+          </p:cNvSpPr>
+          <p:nvPr>
+            <p:ph type="sldNum" sz="quarter" idx="5"/>
+          </p:nvPr>
+        </p:nvSpPr>
+        <p:spPr/>
+        <p:txBody>
+          <a:bodyPr/>
+          <a:lstStyle/>
+          <a:p>
+            <a:fld id="{E36C4827-840E-4EC5-B0B2-4EAAD02724FF}" type="slidenum">
+              <a:rPr lang="en-US" smtClean="0"/>
+              <a:t>4</a:t>
+            </a:fld>
+            <a:endParaRPr lang="en-US"/>
+          </a:p>
+        </p:txBody>
+      </p:sp>
+    </p:spTree>
+    <p:extLst>
+      <p:ext uri="{BB962C8B-B14F-4D97-AF65-F5344CB8AC3E}">
+        <p14:creationId xmlns:p14="http://schemas.microsoft.com/office/powerpoint/2010/main" val="3146041216"/>
+      </p:ext>
+    </p:extLst>
+  </p:cSld>
+  <p:clrMapOvr>
+    <a:masterClrMapping/>
+  </p:clrMapOvr>
+</p:notes>
+</file>
+
+<file path=ppt/notesSlides/notesSlide4.xml><?xml version="1.0" encoding="utf-8"?>
+<p:notes xmlns:a="http://schemas.openxmlformats.org/drawingml/2006/main" xmlns:r="http://schemas.openxmlformats.org/officeDocument/2006/relationships" xmlns:p="http://schemas.openxmlformats.org/presentationml/2006/main">
+  <p:cSld>
+    <p:spTree>
+      <p:nvGrpSpPr>
         <p:cNvPr id="1" name="">
           <a:extLst>
             <a:ext uri="{FF2B5EF4-FFF2-40B4-BE49-F238E27FC236}">
@@ -1156,90 +1552,6 @@
     <p:extLst>
       <p:ext uri="{BB962C8B-B14F-4D97-AF65-F5344CB8AC3E}">
         <p14:creationId xmlns:p14="http://schemas.microsoft.com/office/powerpoint/2010/main" val="273506988"/>
-      </p:ext>
-    </p:extLst>
-  </p:cSld>
-  <p:clrMapOvr>
-    <a:masterClrMapping/>
-  </p:clrMapOvr>
-</p:notes>
-</file>
-
-<file path=ppt/notesSlides/notesSlide4.xml><?xml version="1.0" encoding="utf-8"?>
-<p:notes xmlns:a="http://schemas.openxmlformats.org/drawingml/2006/main" xmlns:r="http://schemas.openxmlformats.org/officeDocument/2006/relationships" xmlns:p="http://schemas.openxmlformats.org/presentationml/2006/main">
-  <p:cSld>
-    <p:spTree>
-      <p:nvGrpSpPr>
-        <p:cNvPr id="1" name=""/>
-        <p:cNvGrpSpPr/>
-        <p:nvPr/>
-      </p:nvGrpSpPr>
-      <p:grpSpPr>
-        <a:xfrm>
-          <a:off x="0" y="0"/>
-          <a:ext cx="0" cy="0"/>
-          <a:chOff x="0" y="0"/>
-          <a:chExt cx="0" cy="0"/>
-        </a:xfrm>
-      </p:grpSpPr>
-      <p:sp>
-        <p:nvSpPr>
-          <p:cNvPr id="2" name="Slide Image Placeholder 1"/>
-          <p:cNvSpPr>
-            <a:spLocks noGrp="1" noRot="1" noChangeAspect="1"/>
-          </p:cNvSpPr>
-          <p:nvPr>
-            <p:ph type="sldImg"/>
-          </p:nvPr>
-        </p:nvSpPr>
-        <p:spPr/>
-      </p:sp>
-      <p:sp>
-        <p:nvSpPr>
-          <p:cNvPr id="3" name="Notes Placeholder 2"/>
-          <p:cNvSpPr>
-            <a:spLocks noGrp="1"/>
-          </p:cNvSpPr>
-          <p:nvPr>
-            <p:ph type="body" idx="1"/>
-          </p:nvPr>
-        </p:nvSpPr>
-        <p:spPr/>
-        <p:txBody>
-          <a:bodyPr/>
-          <a:lstStyle/>
-          <a:p>
-            <a:endParaRPr lang="en-US" dirty="0"/>
-          </a:p>
-        </p:txBody>
-      </p:sp>
-      <p:sp>
-        <p:nvSpPr>
-          <p:cNvPr id="4" name="Slide Number Placeholder 3"/>
-          <p:cNvSpPr>
-            <a:spLocks noGrp="1"/>
-          </p:cNvSpPr>
-          <p:nvPr>
-            <p:ph type="sldNum" sz="quarter" idx="10"/>
-          </p:nvPr>
-        </p:nvSpPr>
-        <p:spPr/>
-        <p:txBody>
-          <a:bodyPr/>
-          <a:lstStyle/>
-          <a:p>
-            <a:fld id="{E36C4827-840E-4EC5-B0B2-4EAAD02724FF}" type="slidenum">
-              <a:rPr lang="en-US" smtClean="0"/>
-              <a:t>10</a:t>
-            </a:fld>
-            <a:endParaRPr lang="en-US"/>
-          </a:p>
-        </p:txBody>
-      </p:sp>
-    </p:spTree>
-    <p:extLst>
-      <p:ext uri="{BB962C8B-B14F-4D97-AF65-F5344CB8AC3E}">
-        <p14:creationId xmlns:p14="http://schemas.microsoft.com/office/powerpoint/2010/main" val="2579532910"/>
       </p:ext>
     </p:extLst>
   </p:cSld>
@@ -1314,7 +1626,7 @@
           <a:p>
             <a:fld id="{E36C4827-840E-4EC5-B0B2-4EAAD02724FF}" type="slidenum">
               <a:rPr lang="en-US" smtClean="0"/>
-              <a:t>11</a:t>
+              <a:t>10</a:t>
             </a:fld>
             <a:endParaRPr lang="en-US"/>
           </a:p>
@@ -1323,7 +1635,7 @@
     </p:spTree>
     <p:extLst>
       <p:ext uri="{BB962C8B-B14F-4D97-AF65-F5344CB8AC3E}">
-        <p14:creationId xmlns:p14="http://schemas.microsoft.com/office/powerpoint/2010/main" val="2366139153"/>
+        <p14:creationId xmlns:p14="http://schemas.microsoft.com/office/powerpoint/2010/main" val="2579532910"/>
       </p:ext>
     </p:extLst>
   </p:cSld>
@@ -1398,7 +1710,7 @@
           <a:p>
             <a:fld id="{E36C4827-840E-4EC5-B0B2-4EAAD02724FF}" type="slidenum">
               <a:rPr lang="en-US" smtClean="0"/>
-              <a:t>12</a:t>
+              <a:t>11</a:t>
             </a:fld>
             <a:endParaRPr lang="en-US"/>
           </a:p>
@@ -1407,7 +1719,7 @@
     </p:spTree>
     <p:extLst>
       <p:ext uri="{BB962C8B-B14F-4D97-AF65-F5344CB8AC3E}">
-        <p14:creationId xmlns:p14="http://schemas.microsoft.com/office/powerpoint/2010/main" val="1186017497"/>
+        <p14:creationId xmlns:p14="http://schemas.microsoft.com/office/powerpoint/2010/main" val="2366139153"/>
       </p:ext>
     </p:extLst>
   </p:cSld>
@@ -1482,7 +1794,7 @@
           <a:p>
             <a:fld id="{E36C4827-840E-4EC5-B0B2-4EAAD02724FF}" type="slidenum">
               <a:rPr lang="en-US" smtClean="0"/>
-              <a:t>13</a:t>
+              <a:t>12</a:t>
             </a:fld>
             <a:endParaRPr lang="en-US"/>
           </a:p>
@@ -1491,7 +1803,7 @@
     </p:spTree>
     <p:extLst>
       <p:ext uri="{BB962C8B-B14F-4D97-AF65-F5344CB8AC3E}">
-        <p14:creationId xmlns:p14="http://schemas.microsoft.com/office/powerpoint/2010/main" val="2423599417"/>
+        <p14:creationId xmlns:p14="http://schemas.microsoft.com/office/powerpoint/2010/main" val="1186017497"/>
       </p:ext>
     </p:extLst>
   </p:cSld>
@@ -1566,7 +1878,7 @@
           <a:p>
             <a:fld id="{E36C4827-840E-4EC5-B0B2-4EAAD02724FF}" type="slidenum">
               <a:rPr lang="en-US" smtClean="0"/>
-              <a:t>14</a:t>
+              <a:t>13</a:t>
             </a:fld>
             <a:endParaRPr lang="en-US"/>
           </a:p>
@@ -1575,7 +1887,7 @@
     </p:spTree>
     <p:extLst>
       <p:ext uri="{BB962C8B-B14F-4D97-AF65-F5344CB8AC3E}">
-        <p14:creationId xmlns:p14="http://schemas.microsoft.com/office/powerpoint/2010/main" val="3568242645"/>
+        <p14:creationId xmlns:p14="http://schemas.microsoft.com/office/powerpoint/2010/main" val="2423599417"/>
       </p:ext>
     </p:extLst>
   </p:cSld>
@@ -1650,7 +1962,7 @@
           <a:p>
             <a:fld id="{E36C4827-840E-4EC5-B0B2-4EAAD02724FF}" type="slidenum">
               <a:rPr lang="en-US" smtClean="0"/>
-              <a:t>15</a:t>
+              <a:t>14</a:t>
             </a:fld>
             <a:endParaRPr lang="en-US"/>
           </a:p>
@@ -1659,7 +1971,7 @@
     </p:spTree>
     <p:extLst>
       <p:ext uri="{BB962C8B-B14F-4D97-AF65-F5344CB8AC3E}">
-        <p14:creationId xmlns:p14="http://schemas.microsoft.com/office/powerpoint/2010/main" val="1377911668"/>
+        <p14:creationId xmlns:p14="http://schemas.microsoft.com/office/powerpoint/2010/main" val="3568242645"/>
       </p:ext>
     </p:extLst>
   </p:cSld>
@@ -1800,7 +2112,7 @@
           <a:p>
             <a:fld id="{477A1531-9024-480F-9D7B-19915C1DCDF5}" type="datetimeFigureOut">
               <a:rPr lang="en-GB" smtClean="0"/>
-              <a:t>18/10/2026</a:t>
+              <a:t>20/10/2026</a:t>
             </a:fld>
             <a:endParaRPr lang="en-GB"/>
           </a:p>
@@ -1970,7 +2282,7 @@
           <a:p>
             <a:fld id="{477A1531-9024-480F-9D7B-19915C1DCDF5}" type="datetimeFigureOut">
               <a:rPr lang="en-GB" smtClean="0"/>
-              <a:t>18/10/2026</a:t>
+              <a:t>20/10/2026</a:t>
             </a:fld>
             <a:endParaRPr lang="en-GB"/>
           </a:p>
@@ -2150,7 +2462,7 @@
           <a:p>
             <a:fld id="{477A1531-9024-480F-9D7B-19915C1DCDF5}" type="datetimeFigureOut">
               <a:rPr lang="en-GB" smtClean="0"/>
-              <a:t>18/10/2026</a:t>
+              <a:t>20/10/2026</a:t>
             </a:fld>
             <a:endParaRPr lang="en-GB"/>
           </a:p>
@@ -2320,7 +2632,7 @@
           <a:p>
             <a:fld id="{477A1531-9024-480F-9D7B-19915C1DCDF5}" type="datetimeFigureOut">
               <a:rPr lang="en-GB" smtClean="0"/>
-              <a:t>18/10/2026</a:t>
+              <a:t>20/10/2026</a:t>
             </a:fld>
             <a:endParaRPr lang="en-GB"/>
           </a:p>
@@ -2566,7 +2878,7 @@
           <a:p>
             <a:fld id="{477A1531-9024-480F-9D7B-19915C1DCDF5}" type="datetimeFigureOut">
               <a:rPr lang="en-GB" smtClean="0"/>
-              <a:t>18/10/2026</a:t>
+              <a:t>20/10/2026</a:t>
             </a:fld>
             <a:endParaRPr lang="en-GB"/>
           </a:p>
@@ -2798,7 +3110,7 @@
           <a:p>
             <a:fld id="{477A1531-9024-480F-9D7B-19915C1DCDF5}" type="datetimeFigureOut">
               <a:rPr lang="en-GB" smtClean="0"/>
-              <a:t>18/10/2026</a:t>
+              <a:t>20/10/2026</a:t>
             </a:fld>
             <a:endParaRPr lang="en-GB"/>
           </a:p>
@@ -3165,7 +3477,7 @@
           <a:p>
             <a:fld id="{477A1531-9024-480F-9D7B-19915C1DCDF5}" type="datetimeFigureOut">
               <a:rPr lang="en-GB" smtClean="0"/>
-              <a:t>18/10/2026</a:t>
+              <a:t>20/10/2026</a:t>
             </a:fld>
             <a:endParaRPr lang="en-GB"/>
           </a:p>
@@ -3283,7 +3595,7 @@
           <a:p>
             <a:fld id="{477A1531-9024-480F-9D7B-19915C1DCDF5}" type="datetimeFigureOut">
               <a:rPr lang="en-GB" smtClean="0"/>
-              <a:t>18/10/2026</a:t>
+              <a:t>20/10/2026</a:t>
             </a:fld>
             <a:endParaRPr lang="en-GB"/>
           </a:p>
@@ -3378,7 +3690,7 @@
           <a:p>
             <a:fld id="{477A1531-9024-480F-9D7B-19915C1DCDF5}" type="datetimeFigureOut">
               <a:rPr lang="en-GB" smtClean="0"/>
-              <a:t>18/10/2026</a:t>
+              <a:t>20/10/2026</a:t>
             </a:fld>
             <a:endParaRPr lang="en-GB"/>
           </a:p>
@@ -3655,7 +3967,7 @@
           <a:p>
             <a:fld id="{477A1531-9024-480F-9D7B-19915C1DCDF5}" type="datetimeFigureOut">
               <a:rPr lang="en-GB" smtClean="0"/>
-              <a:t>18/10/2026</a:t>
+              <a:t>20/10/2026</a:t>
             </a:fld>
             <a:endParaRPr lang="en-GB"/>
           </a:p>
@@ -3908,7 +4220,7 @@
           <a:p>
             <a:fld id="{477A1531-9024-480F-9D7B-19915C1DCDF5}" type="datetimeFigureOut">
               <a:rPr lang="en-GB" smtClean="0"/>
-              <a:t>18/10/2026</a:t>
+              <a:t>20/10/2026</a:t>
             </a:fld>
             <a:endParaRPr lang="en-GB"/>
           </a:p>
@@ -4121,7 +4433,7 @@
           <a:p>
             <a:fld id="{477A1531-9024-480F-9D7B-19915C1DCDF5}" type="datetimeFigureOut">
               <a:rPr lang="en-GB" smtClean="0"/>
-              <a:t>18/10/2026</a:t>
+              <a:t>20/10/2026</a:t>
             </a:fld>
             <a:endParaRPr lang="en-GB"/>
           </a:p>
@@ -4561,13 +4873,15 @@
           <a:lstStyle/>
           <a:p>
             <a:r>
-              <a:rPr lang="en-US" sz="2800" dirty="0">
+              <a:rPr lang="en-US" sz="2800" b="1" dirty="0">
+                <a:latin typeface="Corbel" panose="020B0503020204020204" pitchFamily="34" charset="0"/>
                 <a:ea typeface="Lato" panose="020B0604020202020204" pitchFamily="34" charset="0"/>
                 <a:cs typeface="Helvetica" panose="020B0604020202020204" pitchFamily="34" charset="0"/>
               </a:rPr>
-              <a:t>Ensemble methods</a:t>
-            </a:r>
-            <a:endParaRPr lang="en-GB" sz="2800" dirty="0">
+              <a:t>Ensemble methods can use overfitting and underfitting to their advantage</a:t>
+            </a:r>
+            <a:endParaRPr lang="en-GB" sz="2800" b="1" dirty="0">
+              <a:latin typeface="Corbel" panose="020B0503020204020204" pitchFamily="34" charset="0"/>
               <a:ea typeface="Lato" panose="020B0604020202020204" pitchFamily="34" charset="0"/>
               <a:cs typeface="Helvetica" panose="020B0604020202020204" pitchFamily="34" charset="0"/>
             </a:endParaRPr>
@@ -4807,15 +5121,15 @@
           <a:lstStyle/>
           <a:p>
             <a:r>
-              <a:rPr lang="en-US" sz="2800" dirty="0">
-                <a:latin typeface="+mj-lt"/>
+              <a:rPr lang="en-US" sz="2800" b="1" dirty="0">
+                <a:latin typeface="Corbel" panose="020B0503020204020204" pitchFamily="34" charset="0"/>
                 <a:ea typeface="Lato" panose="020B0604020202020204" pitchFamily="34" charset="0"/>
                 <a:cs typeface="Helvetica" panose="020B0604020202020204" pitchFamily="34" charset="0"/>
               </a:rPr>
-              <a:t>bias &lt;&gt; variance</a:t>
-            </a:r>
-            <a:endParaRPr lang="en-GB" sz="2800" dirty="0">
-              <a:latin typeface="+mj-lt"/>
+              <a:t>Concept of bias and variance is a foundation of fitting models</a:t>
+            </a:r>
+            <a:endParaRPr lang="en-GB" sz="2800" b="1" dirty="0">
+              <a:latin typeface="Corbel" panose="020B0503020204020204" pitchFamily="34" charset="0"/>
               <a:ea typeface="Lato" panose="020B0604020202020204" pitchFamily="34" charset="0"/>
               <a:cs typeface="Helvetica" panose="020B0604020202020204" pitchFamily="34" charset="0"/>
             </a:endParaRPr>
@@ -5088,7 +5402,7 @@
         <p:spPr>
           <a:xfrm>
             <a:off x="241301" y="129804"/>
-            <a:ext cx="11747500" cy="523220"/>
+            <a:ext cx="11747500" cy="1015663"/>
           </a:xfrm>
           <a:prstGeom prst="rect">
             <a:avLst/>
@@ -5102,15 +5416,15 @@
           <a:lstStyle/>
           <a:p>
             <a:r>
-              <a:rPr lang="en-US" sz="2800" dirty="0">
-                <a:latin typeface="+mj-lt"/>
+              <a:rPr lang="en-US" sz="3000" b="1" dirty="0">
+                <a:latin typeface="Corbel" panose="020B0503020204020204" pitchFamily="34" charset="0"/>
                 <a:ea typeface="Lato" panose="020B0604020202020204" pitchFamily="34" charset="0"/>
                 <a:cs typeface="Helvetica" panose="020B0604020202020204" pitchFamily="34" charset="0"/>
               </a:rPr>
-              <a:t>bagging &lt;&gt; boosting</a:t>
-            </a:r>
-            <a:endParaRPr lang="en-GB" sz="2800" dirty="0">
-              <a:latin typeface="+mj-lt"/>
+              <a:t>Bagging and boosting use under- and overfitting to get more performant models</a:t>
+            </a:r>
+            <a:endParaRPr lang="en-GB" sz="3000" b="1" dirty="0">
+              <a:latin typeface="Corbel" panose="020B0503020204020204" pitchFamily="34" charset="0"/>
               <a:ea typeface="Lato" panose="020B0604020202020204" pitchFamily="34" charset="0"/>
               <a:cs typeface="Helvetica" panose="020B0604020202020204" pitchFamily="34" charset="0"/>
             </a:endParaRPr>
@@ -5313,7 +5627,7 @@
         <p:spPr>
           <a:xfrm>
             <a:off x="241301" y="129804"/>
-            <a:ext cx="11747500" cy="523220"/>
+            <a:ext cx="11747500" cy="1015663"/>
           </a:xfrm>
           <a:prstGeom prst="rect">
             <a:avLst/>
@@ -5327,15 +5641,15 @@
           <a:lstStyle/>
           <a:p>
             <a:r>
-              <a:rPr lang="en-US" sz="2800" dirty="0">
-                <a:latin typeface="+mj-lt"/>
+              <a:rPr lang="en-US" sz="3000" b="1" dirty="0">
+                <a:latin typeface="Corbel" panose="020B0503020204020204" pitchFamily="34" charset="0"/>
                 <a:ea typeface="Lato" panose="020B0604020202020204" pitchFamily="34" charset="0"/>
                 <a:cs typeface="Helvetica" panose="020B0604020202020204" pitchFamily="34" charset="0"/>
               </a:rPr>
-              <a:t>bagging</a:t>
-            </a:r>
-            <a:endParaRPr lang="en-GB" sz="2800" dirty="0">
-              <a:latin typeface="+mj-lt"/>
+              <a:t>Bagging uses multiple overfitted (high variance) trees to reduce overfitting (low variance)</a:t>
+            </a:r>
+            <a:endParaRPr lang="en-GB" sz="3000" b="1" dirty="0">
+              <a:latin typeface="Corbel" panose="020B0503020204020204" pitchFamily="34" charset="0"/>
               <a:ea typeface="Lato" panose="020B0604020202020204" pitchFamily="34" charset="0"/>
               <a:cs typeface="Helvetica" panose="020B0604020202020204" pitchFamily="34" charset="0"/>
             </a:endParaRPr>
@@ -5584,7 +5898,7 @@
         <p:spPr>
           <a:xfrm>
             <a:off x="241301" y="129804"/>
-            <a:ext cx="11747500" cy="523220"/>
+            <a:ext cx="11747500" cy="553998"/>
           </a:xfrm>
           <a:prstGeom prst="rect">
             <a:avLst/>
@@ -5598,15 +5912,15 @@
           <a:lstStyle/>
           <a:p>
             <a:r>
-              <a:rPr lang="en-US" sz="2800" dirty="0">
-                <a:latin typeface="+mj-lt"/>
+              <a:rPr lang="en-US" sz="3000" b="1" dirty="0">
+                <a:latin typeface="Corbel" panose="020B0503020204020204" pitchFamily="34" charset="0"/>
                 <a:ea typeface="Lato" panose="020B0604020202020204" pitchFamily="34" charset="0"/>
                 <a:cs typeface="Helvetica" panose="020B0604020202020204" pitchFamily="34" charset="0"/>
               </a:rPr>
-              <a:t>bagging: Random Forest</a:t>
-            </a:r>
-            <a:endParaRPr lang="en-GB" sz="2800" dirty="0">
-              <a:latin typeface="+mj-lt"/>
+              <a:t>Bagging: Random Forest</a:t>
+            </a:r>
+            <a:endParaRPr lang="en-GB" sz="3000" b="1" dirty="0">
+              <a:latin typeface="Corbel" panose="020B0503020204020204" pitchFamily="34" charset="0"/>
               <a:ea typeface="Lato" panose="020B0604020202020204" pitchFamily="34" charset="0"/>
               <a:cs typeface="Helvetica" panose="020B0604020202020204" pitchFamily="34" charset="0"/>
             </a:endParaRPr>
@@ -5688,7 +6002,7 @@
         <p:spPr>
           <a:xfrm>
             <a:off x="241301" y="129804"/>
-            <a:ext cx="11747500" cy="523220"/>
+            <a:ext cx="11747500" cy="553998"/>
           </a:xfrm>
           <a:prstGeom prst="rect">
             <a:avLst/>
@@ -5702,15 +6016,15 @@
           <a:lstStyle/>
           <a:p>
             <a:r>
-              <a:rPr lang="en-US" sz="2800" dirty="0">
-                <a:latin typeface="+mj-lt"/>
+              <a:rPr lang="en-US" sz="3000" b="1" dirty="0">
+                <a:latin typeface="Corbel" panose="020B0503020204020204" pitchFamily="34" charset="0"/>
                 <a:ea typeface="Lato" panose="020B0604020202020204" pitchFamily="34" charset="0"/>
                 <a:cs typeface="Helvetica" panose="020B0604020202020204" pitchFamily="34" charset="0"/>
               </a:rPr>
-              <a:t>bagging: Random Forest</a:t>
-            </a:r>
-            <a:endParaRPr lang="en-GB" sz="2800" dirty="0">
-              <a:latin typeface="+mj-lt"/>
+              <a:t>Bagging: Random Forest</a:t>
+            </a:r>
+            <a:endParaRPr lang="en-GB" sz="3000" b="1" dirty="0">
+              <a:latin typeface="Corbel" panose="020B0503020204020204" pitchFamily="34" charset="0"/>
               <a:ea typeface="Lato" panose="020B0604020202020204" pitchFamily="34" charset="0"/>
               <a:cs typeface="Helvetica" panose="020B0604020202020204" pitchFamily="34" charset="0"/>
             </a:endParaRPr>
@@ -6082,7 +6396,7 @@
         <p:spPr>
           <a:xfrm>
             <a:off x="241301" y="129804"/>
-            <a:ext cx="11747500" cy="523220"/>
+            <a:ext cx="11747500" cy="1015663"/>
           </a:xfrm>
           <a:prstGeom prst="rect">
             <a:avLst/>
@@ -6096,15 +6410,15 @@
           <a:lstStyle/>
           <a:p>
             <a:r>
-              <a:rPr lang="en-US" sz="2800" dirty="0">
-                <a:latin typeface="+mj-lt"/>
+              <a:rPr lang="en-US" sz="3000" b="1" dirty="0">
+                <a:latin typeface="Corbel" panose="020B0503020204020204" pitchFamily="34" charset="0"/>
                 <a:ea typeface="Lato" panose="020B0604020202020204" pitchFamily="34" charset="0"/>
                 <a:cs typeface="Helvetica" panose="020B0604020202020204" pitchFamily="34" charset="0"/>
               </a:rPr>
-              <a:t>boosting</a:t>
-            </a:r>
-            <a:endParaRPr lang="en-GB" sz="2800" dirty="0">
-              <a:latin typeface="+mj-lt"/>
+              <a:t>Boosting uses multiple underfitted (low variance; high bias) trees to reduce underfitting (low variance; low bias)</a:t>
+            </a:r>
+            <a:endParaRPr lang="en-GB" sz="3000" b="1" dirty="0">
+              <a:latin typeface="Corbel" panose="020B0503020204020204" pitchFamily="34" charset="0"/>
               <a:ea typeface="Lato" panose="020B0604020202020204" pitchFamily="34" charset="0"/>
               <a:cs typeface="Helvetica" panose="020B0604020202020204" pitchFamily="34" charset="0"/>
             </a:endParaRPr>
@@ -6276,7 +6590,7 @@
         <p:spPr>
           <a:xfrm>
             <a:off x="241301" y="129804"/>
-            <a:ext cx="11747500" cy="523220"/>
+            <a:ext cx="11747500" cy="553998"/>
           </a:xfrm>
           <a:prstGeom prst="rect">
             <a:avLst/>
@@ -6290,15 +6604,15 @@
           <a:lstStyle/>
           <a:p>
             <a:r>
-              <a:rPr lang="en-US" sz="2800" dirty="0">
-                <a:latin typeface="+mj-lt"/>
+              <a:rPr lang="en-US" sz="3000" b="1" dirty="0">
+                <a:latin typeface="Corbel" panose="020B0503020204020204" pitchFamily="34" charset="0"/>
                 <a:ea typeface="Lato" panose="020B0604020202020204" pitchFamily="34" charset="0"/>
                 <a:cs typeface="Helvetica" panose="020B0604020202020204" pitchFamily="34" charset="0"/>
               </a:rPr>
-              <a:t>boosting: Gradient boosting</a:t>
-            </a:r>
-            <a:endParaRPr lang="en-GB" sz="2800" dirty="0">
-              <a:latin typeface="+mj-lt"/>
+              <a:t>Boosting: Gradient boosting</a:t>
+            </a:r>
+            <a:endParaRPr lang="en-GB" sz="3000" b="1" dirty="0">
+              <a:latin typeface="Corbel" panose="020B0503020204020204" pitchFamily="34" charset="0"/>
               <a:ea typeface="Lato" panose="020B0604020202020204" pitchFamily="34" charset="0"/>
               <a:cs typeface="Helvetica" panose="020B0604020202020204" pitchFamily="34" charset="0"/>
             </a:endParaRPr>
@@ -6380,7 +6694,7 @@
         <p:spPr>
           <a:xfrm>
             <a:off x="241301" y="129804"/>
-            <a:ext cx="11747500" cy="523220"/>
+            <a:ext cx="11747500" cy="553998"/>
           </a:xfrm>
           <a:prstGeom prst="rect">
             <a:avLst/>
@@ -6394,15 +6708,15 @@
           <a:lstStyle/>
           <a:p>
             <a:r>
-              <a:rPr lang="en-US" sz="2800" dirty="0">
-                <a:latin typeface="+mj-lt"/>
+              <a:rPr lang="en-US" sz="3000" b="1" dirty="0">
+                <a:latin typeface="Corbel" panose="020B0503020204020204" pitchFamily="34" charset="0"/>
                 <a:ea typeface="Lato" panose="020B0604020202020204" pitchFamily="34" charset="0"/>
                 <a:cs typeface="Helvetica" panose="020B0604020202020204" pitchFamily="34" charset="0"/>
               </a:rPr>
-              <a:t>boosting: Gradient boosting</a:t>
-            </a:r>
-            <a:endParaRPr lang="en-GB" sz="2800" dirty="0">
-              <a:latin typeface="+mj-lt"/>
+              <a:t>Boosting: Gradient boosting</a:t>
+            </a:r>
+            <a:endParaRPr lang="en-GB" sz="3000" b="1" dirty="0">
+              <a:latin typeface="Corbel" panose="020B0503020204020204" pitchFamily="34" charset="0"/>
               <a:ea typeface="Lato" panose="020B0604020202020204" pitchFamily="34" charset="0"/>
               <a:cs typeface="Helvetica" panose="020B0604020202020204" pitchFamily="34" charset="0"/>
             </a:endParaRPr>
@@ -6492,7 +6806,7 @@
         <p:spPr>
           <a:xfrm>
             <a:off x="241301" y="129804"/>
-            <a:ext cx="11747500" cy="523220"/>
+            <a:ext cx="11747500" cy="553998"/>
           </a:xfrm>
           <a:prstGeom prst="rect">
             <a:avLst/>
@@ -6506,15 +6820,15 @@
           <a:lstStyle/>
           <a:p>
             <a:r>
-              <a:rPr lang="en-US" sz="2800" dirty="0">
-                <a:latin typeface="+mj-lt"/>
+              <a:rPr lang="en-US" sz="3000" b="1" dirty="0">
+                <a:latin typeface="Corbel" panose="020B0503020204020204" pitchFamily="34" charset="0"/>
                 <a:ea typeface="Lato" panose="020B0604020202020204" pitchFamily="34" charset="0"/>
                 <a:cs typeface="Helvetica" panose="020B0604020202020204" pitchFamily="34" charset="0"/>
               </a:rPr>
-              <a:t>decision tree models</a:t>
-            </a:r>
-            <a:endParaRPr lang="en-GB" sz="2800" dirty="0">
-              <a:latin typeface="+mj-lt"/>
+              <a:t>Decision tree models - recap</a:t>
+            </a:r>
+            <a:endParaRPr lang="en-GB" sz="3000" b="1" dirty="0">
+              <a:latin typeface="Corbel" panose="020B0503020204020204" pitchFamily="34" charset="0"/>
               <a:ea typeface="Lato" panose="020B0604020202020204" pitchFamily="34" charset="0"/>
               <a:cs typeface="Helvetica" panose="020B0604020202020204" pitchFamily="34" charset="0"/>
             </a:endParaRPr>
@@ -6883,7 +7197,7 @@
         <p:spPr>
           <a:xfrm>
             <a:off x="241301" y="129804"/>
-            <a:ext cx="11747500" cy="523220"/>
+            <a:ext cx="11747500" cy="553998"/>
           </a:xfrm>
           <a:prstGeom prst="rect">
             <a:avLst/>
@@ -6897,13 +7211,15 @@
           <a:lstStyle/>
           <a:p>
             <a:r>
-              <a:rPr lang="en-US" sz="2800" dirty="0">
+              <a:rPr lang="en-US" sz="3000" b="1" dirty="0">
+                <a:latin typeface="Corbel" panose="020B0503020204020204" pitchFamily="34" charset="0"/>
                 <a:ea typeface="Lato" panose="020B0604020202020204" pitchFamily="34" charset="0"/>
                 <a:cs typeface="Helvetica" panose="020B0604020202020204" pitchFamily="34" charset="0"/>
               </a:rPr>
-              <a:t>Decision tree</a:t>
-            </a:r>
-            <a:endParaRPr lang="en-GB" sz="2800" dirty="0">
+              <a:t>Single decision trees have several advantages and disadvantages</a:t>
+            </a:r>
+            <a:endParaRPr lang="en-GB" sz="3000" b="1" dirty="0">
+              <a:latin typeface="Corbel" panose="020B0503020204020204" pitchFamily="34" charset="0"/>
               <a:ea typeface="Lato" panose="020B0604020202020204" pitchFamily="34" charset="0"/>
               <a:cs typeface="Helvetica" panose="020B0604020202020204" pitchFamily="34" charset="0"/>
             </a:endParaRPr>
@@ -7002,7 +7318,7 @@
         <p:spPr>
           <a:xfrm>
             <a:off x="241301" y="129804"/>
-            <a:ext cx="11747500" cy="523220"/>
+            <a:ext cx="11747500" cy="553998"/>
           </a:xfrm>
           <a:prstGeom prst="rect">
             <a:avLst/>
@@ -7016,15 +7332,15 @@
           <a:lstStyle/>
           <a:p>
             <a:r>
-              <a:rPr lang="en-US" sz="2800" dirty="0">
-                <a:latin typeface="+mj-lt"/>
+              <a:rPr lang="en-US" sz="3000" b="1" dirty="0">
+                <a:latin typeface="Corbel" panose="020B0503020204020204" pitchFamily="34" charset="0"/>
                 <a:ea typeface="Lato" panose="020B0604020202020204" pitchFamily="34" charset="0"/>
                 <a:cs typeface="Helvetica" panose="020B0604020202020204" pitchFamily="34" charset="0"/>
               </a:rPr>
-              <a:t>model selection</a:t>
-            </a:r>
-            <a:endParaRPr lang="en-GB" sz="2800" dirty="0">
-              <a:latin typeface="+mj-lt"/>
+              <a:t>Model hyperparameter optimization on unseen data</a:t>
+            </a:r>
+            <a:endParaRPr lang="en-GB" sz="3000" b="1" dirty="0">
+              <a:latin typeface="Corbel" panose="020B0503020204020204" pitchFamily="34" charset="0"/>
               <a:ea typeface="Lato" panose="020B0604020202020204" pitchFamily="34" charset="0"/>
               <a:cs typeface="Helvetica" panose="020B0604020202020204" pitchFamily="34" charset="0"/>
             </a:endParaRPr>
@@ -7046,7 +7362,7 @@
           <p:nvPr/>
         </p:nvPicPr>
         <p:blipFill>
-          <a:blip r:embed="rId2">
+          <a:blip r:embed="rId3">
             <a:extLst>
               <a:ext uri="{28A0092B-C50C-407E-A947-70E740481C1C}">
                 <a14:useLocalDpi xmlns:a14="http://schemas.microsoft.com/office/drawing/2010/main" val="0"/>
@@ -7136,7 +7452,7 @@
         <p:spPr>
           <a:xfrm>
             <a:off x="241301" y="129804"/>
-            <a:ext cx="11747500" cy="523220"/>
+            <a:ext cx="11747500" cy="553998"/>
           </a:xfrm>
           <a:prstGeom prst="rect">
             <a:avLst/>
@@ -7150,15 +7466,15 @@
           <a:lstStyle/>
           <a:p>
             <a:r>
-              <a:rPr lang="en-US" sz="2800" dirty="0">
-                <a:latin typeface="+mj-lt"/>
+              <a:rPr lang="en-US" sz="3000" b="1" dirty="0">
+                <a:latin typeface="Corbel" panose="020B0503020204020204" pitchFamily="34" charset="0"/>
                 <a:ea typeface="Lato" panose="020B0604020202020204" pitchFamily="34" charset="0"/>
                 <a:cs typeface="Helvetica" panose="020B0604020202020204" pitchFamily="34" charset="0"/>
               </a:rPr>
-              <a:t>regularized linear regression</a:t>
-            </a:r>
-            <a:endParaRPr lang="en-GB" sz="2800" dirty="0">
-              <a:latin typeface="+mj-lt"/>
+              <a:t>Regularized regression</a:t>
+            </a:r>
+            <a:endParaRPr lang="en-GB" sz="3000" b="1" dirty="0">
+              <a:latin typeface="Corbel" panose="020B0503020204020204" pitchFamily="34" charset="0"/>
               <a:ea typeface="Lato" panose="020B0604020202020204" pitchFamily="34" charset="0"/>
               <a:cs typeface="Helvetica" panose="020B0604020202020204" pitchFamily="34" charset="0"/>
             </a:endParaRPr>
@@ -7246,7 +7562,7 @@
         <p:spPr>
           <a:xfrm>
             <a:off x="241301" y="129804"/>
-            <a:ext cx="11747500" cy="523220"/>
+            <a:ext cx="11747500" cy="553998"/>
           </a:xfrm>
           <a:prstGeom prst="rect">
             <a:avLst/>
@@ -7260,8 +7576,8 @@
           <a:lstStyle/>
           <a:p>
             <a:r>
-              <a:rPr lang="en-GB" sz="2800" dirty="0">
-                <a:latin typeface="+mj-lt"/>
+              <a:rPr lang="en-GB" sz="3000" b="1" dirty="0">
+                <a:latin typeface="Corbel" panose="020B0503020204020204" pitchFamily="34" charset="0"/>
                 <a:ea typeface="Lato" panose="020B0604020202020204" pitchFamily="34" charset="0"/>
                 <a:cs typeface="Helvetica" panose="020B0604020202020204" pitchFamily="34" charset="0"/>
               </a:rPr>
@@ -7484,7 +7800,7 @@
         <p:spPr>
           <a:xfrm>
             <a:off x="241301" y="129804"/>
-            <a:ext cx="11747500" cy="523220"/>
+            <a:ext cx="11747500" cy="553998"/>
           </a:xfrm>
           <a:prstGeom prst="rect">
             <a:avLst/>
@@ -7498,23 +7814,23 @@
           <a:lstStyle/>
           <a:p>
             <a:r>
-              <a:rPr lang="en-US" sz="2800" i="1" dirty="0">
-                <a:latin typeface="+mj-lt"/>
+              <a:rPr lang="en-US" sz="3000" b="1" i="1" dirty="0">
+                <a:latin typeface="Corbel" panose="020B0503020204020204" pitchFamily="34" charset="0"/>
                 <a:ea typeface="Lato" panose="020B0604020202020204" pitchFamily="34" charset="0"/>
                 <a:cs typeface="Helvetica" panose="020B0604020202020204" pitchFamily="34" charset="0"/>
               </a:rPr>
               <a:t>5</a:t>
             </a:r>
             <a:r>
-              <a:rPr lang="en-US" sz="2800" dirty="0">
-                <a:latin typeface="+mj-lt"/>
+              <a:rPr lang="en-US" sz="3000" b="1" dirty="0">
+                <a:latin typeface="Corbel" panose="020B0503020204020204" pitchFamily="34" charset="0"/>
                 <a:ea typeface="Lato" panose="020B0604020202020204" pitchFamily="34" charset="0"/>
                 <a:cs typeface="Helvetica" panose="020B0604020202020204" pitchFamily="34" charset="0"/>
               </a:rPr>
-              <a:t>-fold cross-validation</a:t>
-            </a:r>
-            <a:endParaRPr lang="en-GB" sz="2800" dirty="0">
-              <a:latin typeface="+mj-lt"/>
+              <a:t>-fold cross-validation; mostly when not sufficient data is available</a:t>
+            </a:r>
+            <a:endParaRPr lang="en-GB" sz="3000" b="1" dirty="0">
+              <a:latin typeface="Corbel" panose="020B0503020204020204" pitchFamily="34" charset="0"/>
               <a:ea typeface="Lato" panose="020B0604020202020204" pitchFamily="34" charset="0"/>
               <a:cs typeface="Helvetica" panose="020B0604020202020204" pitchFamily="34" charset="0"/>
             </a:endParaRPr>
@@ -7608,7 +7924,7 @@
         <p:spPr>
           <a:xfrm>
             <a:off x="241301" y="129804"/>
-            <a:ext cx="11747500" cy="523220"/>
+            <a:ext cx="11747500" cy="553998"/>
           </a:xfrm>
           <a:prstGeom prst="rect">
             <a:avLst/>
@@ -7622,12 +7938,12 @@
           <a:lstStyle/>
           <a:p>
             <a:r>
-              <a:rPr lang="en-GB" sz="2800" dirty="0">
-                <a:latin typeface="+mj-lt"/>
+              <a:rPr lang="en-GB" sz="3000" b="1" dirty="0">
+                <a:latin typeface="Corbel" panose="020B0503020204020204" pitchFamily="34" charset="0"/>
                 <a:ea typeface="Lato" panose="020B0604020202020204" pitchFamily="34" charset="0"/>
                 <a:cs typeface="Helvetica" panose="020B0604020202020204" pitchFamily="34" charset="0"/>
               </a:rPr>
-              <a:t>Tuning regularization</a:t>
+              <a:t>Where do we want to sit in terms of underfitting and overfitting</a:t>
             </a:r>
           </a:p>
         </p:txBody>
@@ -8029,7 +8345,7 @@
         <p:spPr>
           <a:xfrm>
             <a:off x="241301" y="129804"/>
-            <a:ext cx="11747500" cy="523220"/>
+            <a:ext cx="11747500" cy="553998"/>
           </a:xfrm>
           <a:prstGeom prst="rect">
             <a:avLst/>
@@ -8043,15 +8359,15 @@
           <a:lstStyle/>
           <a:p>
             <a:r>
-              <a:rPr lang="en-US" sz="2800" dirty="0">
-                <a:latin typeface="+mj-lt"/>
+              <a:rPr lang="en-US" sz="3000" b="1" dirty="0">
+                <a:latin typeface="Corbel" panose="020B0503020204020204" pitchFamily="34" charset="0"/>
                 <a:ea typeface="Lato" panose="020B0604020202020204" pitchFamily="34" charset="0"/>
                 <a:cs typeface="Helvetica" panose="020B0604020202020204" pitchFamily="34" charset="0"/>
               </a:rPr>
-              <a:t>bias &lt;&gt; variance</a:t>
-            </a:r>
-            <a:endParaRPr lang="en-GB" sz="2800" dirty="0">
-              <a:latin typeface="+mj-lt"/>
+              <a:t>Concept of bias and variance is a foundation of fitting models</a:t>
+            </a:r>
+            <a:endParaRPr lang="en-GB" sz="3000" b="1" dirty="0">
+              <a:latin typeface="Corbel" panose="020B0503020204020204" pitchFamily="34" charset="0"/>
               <a:ea typeface="Lato" panose="020B0604020202020204" pitchFamily="34" charset="0"/>
               <a:cs typeface="Helvetica" panose="020B0604020202020204" pitchFamily="34" charset="0"/>
             </a:endParaRPr>

--- a/03_Evaluation/slides/3_3_ensemble_learning.pptx
+++ b/03_Evaluation/slides/3_3_ensemble_learning.pptx
@@ -5,10 +5,10 @@
     <p:sldMasterId id="2147483648" r:id="rId1"/>
   </p:sldMasterIdLst>
   <p:notesMasterIdLst>
-    <p:notesMasterId r:id="rId19"/>
+    <p:notesMasterId r:id="rId21"/>
   </p:notesMasterIdLst>
   <p:handoutMasterIdLst>
-    <p:handoutMasterId r:id="rId20"/>
+    <p:handoutMasterId r:id="rId22"/>
   </p:handoutMasterIdLst>
   <p:sldIdLst>
     <p:sldId id="544" r:id="rId2"/>
@@ -26,8 +26,10 @@
     <p:sldId id="264" r:id="rId14"/>
     <p:sldId id="265" r:id="rId15"/>
     <p:sldId id="266" r:id="rId16"/>
-    <p:sldId id="270" r:id="rId17"/>
-    <p:sldId id="272" r:id="rId18"/>
+    <p:sldId id="563" r:id="rId17"/>
+    <p:sldId id="270" r:id="rId18"/>
+    <p:sldId id="564" r:id="rId19"/>
+    <p:sldId id="272" r:id="rId20"/>
   </p:sldIdLst>
   <p:sldSz cx="12192000" cy="6858000"/>
   <p:notesSz cx="6797675" cy="9874250"/>
@@ -493,7 +495,7 @@
           <a:p>
             <a:fld id="{3C10CED3-9D38-496E-A0C9-F8629E5A2A41}" type="datetimeFigureOut">
               <a:rPr lang="en-US" smtClean="0"/>
-              <a:t>10/22/2026</a:t>
+              <a:t>10/28/2026</a:t>
             </a:fld>
             <a:endParaRPr lang="en-US"/>
           </a:p>
@@ -658,7 +660,7 @@
           <a:p>
             <a:fld id="{566A7747-0984-4E12-9222-F6AC1BF9321E}" type="datetimeFigureOut">
               <a:rPr lang="en-US" smtClean="0"/>
-              <a:t>10/20/2026</a:t>
+              <a:t>10/28/2026</a:t>
             </a:fld>
             <a:endParaRPr lang="en-US"/>
           </a:p>
@@ -1122,7 +1124,13 @@
   <p:cSld>
     <p:spTree>
       <p:nvGrpSpPr>
-        <p:cNvPr id="1" name=""/>
+        <p:cNvPr id="1" name="">
+          <a:extLst>
+            <a:ext uri="{FF2B5EF4-FFF2-40B4-BE49-F238E27FC236}">
+              <a16:creationId xmlns:a16="http://schemas.microsoft.com/office/drawing/2014/main" id="{1AE17190-4A4C-6737-D129-2C5A9CB832E7}"/>
+            </a:ext>
+          </a:extLst>
+        </p:cNvPr>
         <p:cNvGrpSpPr/>
         <p:nvPr/>
       </p:nvGrpSpPr>
@@ -1136,7 +1144,13 @@
       </p:grpSpPr>
       <p:sp>
         <p:nvSpPr>
-          <p:cNvPr id="2" name="Slide Image Placeholder 1"/>
+          <p:cNvPr id="2" name="Slide Image Placeholder 1">
+            <a:extLst>
+              <a:ext uri="{FF2B5EF4-FFF2-40B4-BE49-F238E27FC236}">
+                <a16:creationId xmlns:a16="http://schemas.microsoft.com/office/drawing/2014/main" id="{B87BD744-546A-8D39-0B0A-B966C7087B82}"/>
+              </a:ext>
+            </a:extLst>
+          </p:cNvPr>
           <p:cNvSpPr>
             <a:spLocks noGrp="1" noRot="1" noChangeAspect="1"/>
           </p:cNvSpPr>
@@ -1148,7 +1162,13 @@
       </p:sp>
       <p:sp>
         <p:nvSpPr>
-          <p:cNvPr id="3" name="Notes Placeholder 2"/>
+          <p:cNvPr id="3" name="Notes Placeholder 2">
+            <a:extLst>
+              <a:ext uri="{FF2B5EF4-FFF2-40B4-BE49-F238E27FC236}">
+                <a16:creationId xmlns:a16="http://schemas.microsoft.com/office/drawing/2014/main" id="{8B541E09-CC0B-1A80-12B2-9E05FAA231E1}"/>
+              </a:ext>
+            </a:extLst>
+          </p:cNvPr>
           <p:cNvSpPr>
             <a:spLocks noGrp="1"/>
           </p:cNvSpPr>
@@ -1167,7 +1187,13 @@
       </p:sp>
       <p:sp>
         <p:nvSpPr>
-          <p:cNvPr id="4" name="Slide Number Placeholder 3"/>
+          <p:cNvPr id="4" name="Slide Number Placeholder 3">
+            <a:extLst>
+              <a:ext uri="{FF2B5EF4-FFF2-40B4-BE49-F238E27FC236}">
+                <a16:creationId xmlns:a16="http://schemas.microsoft.com/office/drawing/2014/main" id="{C3C2010F-3701-E000-0157-35AA0077987E}"/>
+              </a:ext>
+            </a:extLst>
+          </p:cNvPr>
           <p:cNvSpPr>
             <a:spLocks noGrp="1"/>
           </p:cNvSpPr>
@@ -1191,7 +1217,7 @@
     </p:spTree>
     <p:extLst>
       <p:ext uri="{BB962C8B-B14F-4D97-AF65-F5344CB8AC3E}">
-        <p14:creationId xmlns:p14="http://schemas.microsoft.com/office/powerpoint/2010/main" val="994736307"/>
+        <p14:creationId xmlns:p14="http://schemas.microsoft.com/office/powerpoint/2010/main" val="3581785271"/>
       </p:ext>
     </p:extLst>
   </p:cSld>
@@ -1245,7 +1271,7 @@
           <a:bodyPr/>
           <a:lstStyle/>
           <a:p>
-            <a:endParaRPr lang="LID4096" dirty="0"/>
+            <a:endParaRPr lang="en-US" dirty="0"/>
           </a:p>
         </p:txBody>
       </p:sp>
@@ -1256,7 +1282,7 @@
             <a:spLocks noGrp="1"/>
           </p:cNvSpPr>
           <p:nvPr>
-            <p:ph type="sldNum" sz="quarter" idx="5"/>
+            <p:ph type="sldNum" sz="quarter" idx="10"/>
           </p:nvPr>
         </p:nvSpPr>
         <p:spPr/>
@@ -1267,6 +1293,198 @@
             <a:fld id="{E36C4827-840E-4EC5-B0B2-4EAAD02724FF}" type="slidenum">
               <a:rPr lang="en-US" smtClean="0"/>
               <a:t>17</a:t>
+            </a:fld>
+            <a:endParaRPr lang="en-US"/>
+          </a:p>
+        </p:txBody>
+      </p:sp>
+    </p:spTree>
+    <p:extLst>
+      <p:ext uri="{BB962C8B-B14F-4D97-AF65-F5344CB8AC3E}">
+        <p14:creationId xmlns:p14="http://schemas.microsoft.com/office/powerpoint/2010/main" val="994736307"/>
+      </p:ext>
+    </p:extLst>
+  </p:cSld>
+  <p:clrMapOvr>
+    <a:masterClrMapping/>
+  </p:clrMapOvr>
+</p:notes>
+</file>
+
+<file path=ppt/notesSlides/notesSlide13.xml><?xml version="1.0" encoding="utf-8"?>
+<p:notes xmlns:a="http://schemas.openxmlformats.org/drawingml/2006/main" xmlns:r="http://schemas.openxmlformats.org/officeDocument/2006/relationships" xmlns:p="http://schemas.openxmlformats.org/presentationml/2006/main">
+  <p:cSld>
+    <p:spTree>
+      <p:nvGrpSpPr>
+        <p:cNvPr id="1" name="">
+          <a:extLst>
+            <a:ext uri="{FF2B5EF4-FFF2-40B4-BE49-F238E27FC236}">
+              <a16:creationId xmlns:a16="http://schemas.microsoft.com/office/drawing/2014/main" id="{1D694508-DA6A-5D84-2DC5-19CBAAE1B5F3}"/>
+            </a:ext>
+          </a:extLst>
+        </p:cNvPr>
+        <p:cNvGrpSpPr/>
+        <p:nvPr/>
+      </p:nvGrpSpPr>
+      <p:grpSpPr>
+        <a:xfrm>
+          <a:off x="0" y="0"/>
+          <a:ext cx="0" cy="0"/>
+          <a:chOff x="0" y="0"/>
+          <a:chExt cx="0" cy="0"/>
+        </a:xfrm>
+      </p:grpSpPr>
+      <p:sp>
+        <p:nvSpPr>
+          <p:cNvPr id="2" name="Slide Image Placeholder 1">
+            <a:extLst>
+              <a:ext uri="{FF2B5EF4-FFF2-40B4-BE49-F238E27FC236}">
+                <a16:creationId xmlns:a16="http://schemas.microsoft.com/office/drawing/2014/main" id="{1A32AA75-AC74-E8A8-4D0D-1EC19B85B4E6}"/>
+              </a:ext>
+            </a:extLst>
+          </p:cNvPr>
+          <p:cNvSpPr>
+            <a:spLocks noGrp="1" noRot="1" noChangeAspect="1"/>
+          </p:cNvSpPr>
+          <p:nvPr>
+            <p:ph type="sldImg"/>
+          </p:nvPr>
+        </p:nvSpPr>
+        <p:spPr/>
+      </p:sp>
+      <p:sp>
+        <p:nvSpPr>
+          <p:cNvPr id="3" name="Notes Placeholder 2">
+            <a:extLst>
+              <a:ext uri="{FF2B5EF4-FFF2-40B4-BE49-F238E27FC236}">
+                <a16:creationId xmlns:a16="http://schemas.microsoft.com/office/drawing/2014/main" id="{3F1BA6DD-C5C7-EBCD-FEA1-377636C88590}"/>
+              </a:ext>
+            </a:extLst>
+          </p:cNvPr>
+          <p:cNvSpPr>
+            <a:spLocks noGrp="1"/>
+          </p:cNvSpPr>
+          <p:nvPr>
+            <p:ph type="body" idx="1"/>
+          </p:nvPr>
+        </p:nvSpPr>
+        <p:spPr/>
+        <p:txBody>
+          <a:bodyPr/>
+          <a:lstStyle/>
+          <a:p>
+            <a:endParaRPr lang="en-US" dirty="0"/>
+          </a:p>
+        </p:txBody>
+      </p:sp>
+      <p:sp>
+        <p:nvSpPr>
+          <p:cNvPr id="4" name="Slide Number Placeholder 3">
+            <a:extLst>
+              <a:ext uri="{FF2B5EF4-FFF2-40B4-BE49-F238E27FC236}">
+                <a16:creationId xmlns:a16="http://schemas.microsoft.com/office/drawing/2014/main" id="{2BE8D51B-DA21-3F44-C2E9-6F611AE72611}"/>
+              </a:ext>
+            </a:extLst>
+          </p:cNvPr>
+          <p:cNvSpPr>
+            <a:spLocks noGrp="1"/>
+          </p:cNvSpPr>
+          <p:nvPr>
+            <p:ph type="sldNum" sz="quarter" idx="10"/>
+          </p:nvPr>
+        </p:nvSpPr>
+        <p:spPr/>
+        <p:txBody>
+          <a:bodyPr/>
+          <a:lstStyle/>
+          <a:p>
+            <a:fld id="{E36C4827-840E-4EC5-B0B2-4EAAD02724FF}" type="slidenum">
+              <a:rPr lang="en-US" smtClean="0"/>
+              <a:t>18</a:t>
+            </a:fld>
+            <a:endParaRPr lang="en-US"/>
+          </a:p>
+        </p:txBody>
+      </p:sp>
+    </p:spTree>
+    <p:extLst>
+      <p:ext uri="{BB962C8B-B14F-4D97-AF65-F5344CB8AC3E}">
+        <p14:creationId xmlns:p14="http://schemas.microsoft.com/office/powerpoint/2010/main" val="19956152"/>
+      </p:ext>
+    </p:extLst>
+  </p:cSld>
+  <p:clrMapOvr>
+    <a:masterClrMapping/>
+  </p:clrMapOvr>
+</p:notes>
+</file>
+
+<file path=ppt/notesSlides/notesSlide14.xml><?xml version="1.0" encoding="utf-8"?>
+<p:notes xmlns:a="http://schemas.openxmlformats.org/drawingml/2006/main" xmlns:r="http://schemas.openxmlformats.org/officeDocument/2006/relationships" xmlns:p="http://schemas.openxmlformats.org/presentationml/2006/main">
+  <p:cSld>
+    <p:spTree>
+      <p:nvGrpSpPr>
+        <p:cNvPr id="1" name=""/>
+        <p:cNvGrpSpPr/>
+        <p:nvPr/>
+      </p:nvGrpSpPr>
+      <p:grpSpPr>
+        <a:xfrm>
+          <a:off x="0" y="0"/>
+          <a:ext cx="0" cy="0"/>
+          <a:chOff x="0" y="0"/>
+          <a:chExt cx="0" cy="0"/>
+        </a:xfrm>
+      </p:grpSpPr>
+      <p:sp>
+        <p:nvSpPr>
+          <p:cNvPr id="2" name="Slide Image Placeholder 1"/>
+          <p:cNvSpPr>
+            <a:spLocks noGrp="1" noRot="1" noChangeAspect="1"/>
+          </p:cNvSpPr>
+          <p:nvPr>
+            <p:ph type="sldImg"/>
+          </p:nvPr>
+        </p:nvSpPr>
+        <p:spPr/>
+      </p:sp>
+      <p:sp>
+        <p:nvSpPr>
+          <p:cNvPr id="3" name="Notes Placeholder 2"/>
+          <p:cNvSpPr>
+            <a:spLocks noGrp="1"/>
+          </p:cNvSpPr>
+          <p:nvPr>
+            <p:ph type="body" idx="1"/>
+          </p:nvPr>
+        </p:nvSpPr>
+        <p:spPr/>
+        <p:txBody>
+          <a:bodyPr/>
+          <a:lstStyle/>
+          <a:p>
+            <a:endParaRPr lang="LID4096" dirty="0"/>
+          </a:p>
+        </p:txBody>
+      </p:sp>
+      <p:sp>
+        <p:nvSpPr>
+          <p:cNvPr id="4" name="Slide Number Placeholder 3"/>
+          <p:cNvSpPr>
+            <a:spLocks noGrp="1"/>
+          </p:cNvSpPr>
+          <p:nvPr>
+            <p:ph type="sldNum" sz="quarter" idx="5"/>
+          </p:nvPr>
+        </p:nvSpPr>
+        <p:spPr/>
+        <p:txBody>
+          <a:bodyPr/>
+          <a:lstStyle/>
+          <a:p>
+            <a:fld id="{E36C4827-840E-4EC5-B0B2-4EAAD02724FF}" type="slidenum">
+              <a:rPr lang="en-US" smtClean="0"/>
+              <a:t>19</a:t>
             </a:fld>
             <a:endParaRPr lang="en-US"/>
           </a:p>
@@ -2112,7 +2330,7 @@
           <a:p>
             <a:fld id="{477A1531-9024-480F-9D7B-19915C1DCDF5}" type="datetimeFigureOut">
               <a:rPr lang="en-GB" smtClean="0"/>
-              <a:t>20/10/2026</a:t>
+              <a:t>28/10/2026</a:t>
             </a:fld>
             <a:endParaRPr lang="en-GB"/>
           </a:p>
@@ -2282,7 +2500,7 @@
           <a:p>
             <a:fld id="{477A1531-9024-480F-9D7B-19915C1DCDF5}" type="datetimeFigureOut">
               <a:rPr lang="en-GB" smtClean="0"/>
-              <a:t>20/10/2026</a:t>
+              <a:t>28/10/2026</a:t>
             </a:fld>
             <a:endParaRPr lang="en-GB"/>
           </a:p>
@@ -2462,7 +2680,7 @@
           <a:p>
             <a:fld id="{477A1531-9024-480F-9D7B-19915C1DCDF5}" type="datetimeFigureOut">
               <a:rPr lang="en-GB" smtClean="0"/>
-              <a:t>20/10/2026</a:t>
+              <a:t>28/10/2026</a:t>
             </a:fld>
             <a:endParaRPr lang="en-GB"/>
           </a:p>
@@ -2632,7 +2850,7 @@
           <a:p>
             <a:fld id="{477A1531-9024-480F-9D7B-19915C1DCDF5}" type="datetimeFigureOut">
               <a:rPr lang="en-GB" smtClean="0"/>
-              <a:t>20/10/2026</a:t>
+              <a:t>28/10/2026</a:t>
             </a:fld>
             <a:endParaRPr lang="en-GB"/>
           </a:p>
@@ -2878,7 +3096,7 @@
           <a:p>
             <a:fld id="{477A1531-9024-480F-9D7B-19915C1DCDF5}" type="datetimeFigureOut">
               <a:rPr lang="en-GB" smtClean="0"/>
-              <a:t>20/10/2026</a:t>
+              <a:t>28/10/2026</a:t>
             </a:fld>
             <a:endParaRPr lang="en-GB"/>
           </a:p>
@@ -3110,7 +3328,7 @@
           <a:p>
             <a:fld id="{477A1531-9024-480F-9D7B-19915C1DCDF5}" type="datetimeFigureOut">
               <a:rPr lang="en-GB" smtClean="0"/>
-              <a:t>20/10/2026</a:t>
+              <a:t>28/10/2026</a:t>
             </a:fld>
             <a:endParaRPr lang="en-GB"/>
           </a:p>
@@ -3477,7 +3695,7 @@
           <a:p>
             <a:fld id="{477A1531-9024-480F-9D7B-19915C1DCDF5}" type="datetimeFigureOut">
               <a:rPr lang="en-GB" smtClean="0"/>
-              <a:t>20/10/2026</a:t>
+              <a:t>28/10/2026</a:t>
             </a:fld>
             <a:endParaRPr lang="en-GB"/>
           </a:p>
@@ -3595,7 +3813,7 @@
           <a:p>
             <a:fld id="{477A1531-9024-480F-9D7B-19915C1DCDF5}" type="datetimeFigureOut">
               <a:rPr lang="en-GB" smtClean="0"/>
-              <a:t>20/10/2026</a:t>
+              <a:t>28/10/2026</a:t>
             </a:fld>
             <a:endParaRPr lang="en-GB"/>
           </a:p>
@@ -3690,7 +3908,7 @@
           <a:p>
             <a:fld id="{477A1531-9024-480F-9D7B-19915C1DCDF5}" type="datetimeFigureOut">
               <a:rPr lang="en-GB" smtClean="0"/>
-              <a:t>20/10/2026</a:t>
+              <a:t>28/10/2026</a:t>
             </a:fld>
             <a:endParaRPr lang="en-GB"/>
           </a:p>
@@ -3967,7 +4185,7 @@
           <a:p>
             <a:fld id="{477A1531-9024-480F-9D7B-19915C1DCDF5}" type="datetimeFigureOut">
               <a:rPr lang="en-GB" smtClean="0"/>
-              <a:t>20/10/2026</a:t>
+              <a:t>28/10/2026</a:t>
             </a:fld>
             <a:endParaRPr lang="en-GB"/>
           </a:p>
@@ -4220,7 +4438,7 @@
           <a:p>
             <a:fld id="{477A1531-9024-480F-9D7B-19915C1DCDF5}" type="datetimeFigureOut">
               <a:rPr lang="en-GB" smtClean="0"/>
-              <a:t>20/10/2026</a:t>
+              <a:t>28/10/2026</a:t>
             </a:fld>
             <a:endParaRPr lang="en-GB"/>
           </a:p>
@@ -4433,7 +4651,7 @@
           <a:p>
             <a:fld id="{477A1531-9024-480F-9D7B-19915C1DCDF5}" type="datetimeFigureOut">
               <a:rPr lang="en-GB" smtClean="0"/>
-              <a:t>20/10/2026</a:t>
+              <a:t>28/10/2026</a:t>
             </a:fld>
             <a:endParaRPr lang="en-GB"/>
           </a:p>
@@ -6443,6 +6661,307 @@
   <p:cSld>
     <p:spTree>
       <p:nvGrpSpPr>
+        <p:cNvPr id="1" name="">
+          <a:extLst>
+            <a:ext uri="{FF2B5EF4-FFF2-40B4-BE49-F238E27FC236}">
+              <a16:creationId xmlns:a16="http://schemas.microsoft.com/office/drawing/2014/main" id="{E5492D97-164B-F720-1969-7D702BBBBE53}"/>
+            </a:ext>
+          </a:extLst>
+        </p:cNvPr>
+        <p:cNvGrpSpPr/>
+        <p:nvPr/>
+      </p:nvGrpSpPr>
+      <p:grpSpPr>
+        <a:xfrm>
+          <a:off x="0" y="0"/>
+          <a:ext cx="0" cy="0"/>
+          <a:chOff x="0" y="0"/>
+          <a:chExt cx="0" cy="0"/>
+        </a:xfrm>
+      </p:grpSpPr>
+      <p:pic>
+        <p:nvPicPr>
+          <p:cNvPr id="6" name="Picture 2" descr="Related image">
+            <a:extLst>
+              <a:ext uri="{FF2B5EF4-FFF2-40B4-BE49-F238E27FC236}">
+                <a16:creationId xmlns:a16="http://schemas.microsoft.com/office/drawing/2014/main" id="{FEE2F040-C3B7-0916-1222-4D093B772EA1}"/>
+              </a:ext>
+            </a:extLst>
+          </p:cNvPr>
+          <p:cNvPicPr>
+            <a:picLocks noChangeAspect="1" noChangeArrowheads="1"/>
+          </p:cNvPicPr>
+          <p:nvPr/>
+        </p:nvPicPr>
+        <p:blipFill>
+          <a:blip r:embed="rId3">
+            <a:extLst>
+              <a:ext uri="{28A0092B-C50C-407E-A947-70E740481C1C}">
+                <a14:useLocalDpi xmlns:a14="http://schemas.microsoft.com/office/drawing/2010/main" val="0"/>
+              </a:ext>
+            </a:extLst>
+          </a:blip>
+          <a:srcRect/>
+          <a:stretch>
+            <a:fillRect/>
+          </a:stretch>
+        </p:blipFill>
+        <p:spPr bwMode="auto">
+          <a:xfrm>
+            <a:off x="2002219" y="1133853"/>
+            <a:ext cx="6892593" cy="5251182"/>
+          </a:xfrm>
+          <a:prstGeom prst="rect">
+            <a:avLst/>
+          </a:prstGeom>
+          <a:noFill/>
+          <a:extLst>
+            <a:ext uri="{909E8E84-426E-40DD-AFC4-6F175D3DCCD1}">
+              <a14:hiddenFill xmlns:a14="http://schemas.microsoft.com/office/drawing/2010/main">
+                <a:solidFill>
+                  <a:srgbClr val="FFFFFF"/>
+                </a:solidFill>
+              </a14:hiddenFill>
+            </a:ext>
+          </a:extLst>
+        </p:spPr>
+      </p:pic>
+      <p:sp>
+        <p:nvSpPr>
+          <p:cNvPr id="4" name="Arrow: Right 3">
+            <a:extLst>
+              <a:ext uri="{FF2B5EF4-FFF2-40B4-BE49-F238E27FC236}">
+                <a16:creationId xmlns:a16="http://schemas.microsoft.com/office/drawing/2014/main" id="{253FF282-5E3F-D8AA-66A0-A67E7B28C365}"/>
+              </a:ext>
+            </a:extLst>
+          </p:cNvPr>
+          <p:cNvSpPr/>
+          <p:nvPr/>
+        </p:nvSpPr>
+        <p:spPr>
+          <a:xfrm rot="16200000">
+            <a:off x="4074546" y="3808214"/>
+            <a:ext cx="1679029" cy="400337"/>
+          </a:xfrm>
+          <a:prstGeom prst="rightArrow">
+            <a:avLst/>
+          </a:prstGeom>
+          <a:solidFill>
+            <a:schemeClr val="accent1">
+              <a:lumMod val="20000"/>
+              <a:lumOff val="80000"/>
+            </a:schemeClr>
+          </a:solidFill>
+        </p:spPr>
+        <p:style>
+          <a:lnRef idx="2">
+            <a:schemeClr val="accent1">
+              <a:shade val="50000"/>
+            </a:schemeClr>
+          </a:lnRef>
+          <a:fillRef idx="1">
+            <a:schemeClr val="accent1"/>
+          </a:fillRef>
+          <a:effectRef idx="0">
+            <a:schemeClr val="accent1"/>
+          </a:effectRef>
+          <a:fontRef idx="minor">
+            <a:schemeClr val="lt1"/>
+          </a:fontRef>
+        </p:style>
+        <p:txBody>
+          <a:bodyPr rtlCol="0" anchor="ctr"/>
+          <a:lstStyle/>
+          <a:p>
+            <a:pPr algn="ctr"/>
+            <a:endParaRPr lang="nl-BE" dirty="0"/>
+          </a:p>
+        </p:txBody>
+      </p:sp>
+      <p:sp>
+        <p:nvSpPr>
+          <p:cNvPr id="8" name="Arrow: Right 7">
+            <a:extLst>
+              <a:ext uri="{FF2B5EF4-FFF2-40B4-BE49-F238E27FC236}">
+                <a16:creationId xmlns:a16="http://schemas.microsoft.com/office/drawing/2014/main" id="{E9D93B44-60B4-45C7-442D-B491E1125F12}"/>
+              </a:ext>
+            </a:extLst>
+          </p:cNvPr>
+          <p:cNvSpPr/>
+          <p:nvPr/>
+        </p:nvSpPr>
+        <p:spPr>
+          <a:xfrm rot="10800000">
+            <a:off x="5535484" y="2707256"/>
+            <a:ext cx="1679029" cy="400337"/>
+          </a:xfrm>
+          <a:prstGeom prst="rightArrow">
+            <a:avLst/>
+          </a:prstGeom>
+          <a:solidFill>
+            <a:schemeClr val="accent1">
+              <a:lumMod val="20000"/>
+              <a:lumOff val="80000"/>
+            </a:schemeClr>
+          </a:solidFill>
+        </p:spPr>
+        <p:style>
+          <a:lnRef idx="2">
+            <a:schemeClr val="accent1">
+              <a:shade val="50000"/>
+            </a:schemeClr>
+          </a:lnRef>
+          <a:fillRef idx="1">
+            <a:schemeClr val="accent1"/>
+          </a:fillRef>
+          <a:effectRef idx="0">
+            <a:schemeClr val="accent1"/>
+          </a:effectRef>
+          <a:fontRef idx="minor">
+            <a:schemeClr val="lt1"/>
+          </a:fontRef>
+        </p:style>
+        <p:txBody>
+          <a:bodyPr rtlCol="0" anchor="ctr"/>
+          <a:lstStyle/>
+          <a:p>
+            <a:pPr algn="ctr"/>
+            <a:endParaRPr lang="nl-BE"/>
+          </a:p>
+        </p:txBody>
+      </p:sp>
+      <p:sp>
+        <p:nvSpPr>
+          <p:cNvPr id="12" name="TextBox 11">
+            <a:extLst>
+              <a:ext uri="{FF2B5EF4-FFF2-40B4-BE49-F238E27FC236}">
+                <a16:creationId xmlns:a16="http://schemas.microsoft.com/office/drawing/2014/main" id="{BB276D5A-3B30-1D43-B443-1A579B32E1C2}"/>
+              </a:ext>
+            </a:extLst>
+          </p:cNvPr>
+          <p:cNvSpPr txBox="1"/>
+          <p:nvPr/>
+        </p:nvSpPr>
+        <p:spPr>
+          <a:xfrm>
+            <a:off x="4390697" y="3759444"/>
+            <a:ext cx="1797269" cy="461665"/>
+          </a:xfrm>
+          <a:prstGeom prst="rect">
+            <a:avLst/>
+          </a:prstGeom>
+          <a:noFill/>
+        </p:spPr>
+        <p:txBody>
+          <a:bodyPr wrap="square" rtlCol="0">
+            <a:spAutoFit/>
+          </a:bodyPr>
+          <a:lstStyle/>
+          <a:p>
+            <a:r>
+              <a:rPr lang="nl-BE" sz="2400" dirty="0"/>
+              <a:t>bagging</a:t>
+            </a:r>
+          </a:p>
+        </p:txBody>
+      </p:sp>
+      <p:sp>
+        <p:nvSpPr>
+          <p:cNvPr id="13" name="TextBox 12">
+            <a:extLst>
+              <a:ext uri="{FF2B5EF4-FFF2-40B4-BE49-F238E27FC236}">
+                <a16:creationId xmlns:a16="http://schemas.microsoft.com/office/drawing/2014/main" id="{1C509D26-190C-1D84-C9DC-FB4383C5BB8F}"/>
+              </a:ext>
+            </a:extLst>
+          </p:cNvPr>
+          <p:cNvSpPr txBox="1"/>
+          <p:nvPr/>
+        </p:nvSpPr>
+        <p:spPr>
+          <a:xfrm>
+            <a:off x="5741277" y="2645928"/>
+            <a:ext cx="1797269" cy="461665"/>
+          </a:xfrm>
+          <a:prstGeom prst="rect">
+            <a:avLst/>
+          </a:prstGeom>
+          <a:noFill/>
+        </p:spPr>
+        <p:txBody>
+          <a:bodyPr wrap="square" rtlCol="0">
+            <a:spAutoFit/>
+          </a:bodyPr>
+          <a:lstStyle/>
+          <a:p>
+            <a:r>
+              <a:rPr lang="nl-BE" sz="2400" dirty="0"/>
+              <a:t>boosting</a:t>
+            </a:r>
+          </a:p>
+        </p:txBody>
+      </p:sp>
+      <p:sp>
+        <p:nvSpPr>
+          <p:cNvPr id="3" name="TextBox 2">
+            <a:extLst>
+              <a:ext uri="{FF2B5EF4-FFF2-40B4-BE49-F238E27FC236}">
+                <a16:creationId xmlns:a16="http://schemas.microsoft.com/office/drawing/2014/main" id="{DA9B2C7A-D1C3-BA3C-E8D0-A6439060BBFC}"/>
+              </a:ext>
+            </a:extLst>
+          </p:cNvPr>
+          <p:cNvSpPr txBox="1"/>
+          <p:nvPr/>
+        </p:nvSpPr>
+        <p:spPr>
+          <a:xfrm>
+            <a:off x="241301" y="129804"/>
+            <a:ext cx="11747500" cy="1015663"/>
+          </a:xfrm>
+          <a:prstGeom prst="rect">
+            <a:avLst/>
+          </a:prstGeom>
+          <a:noFill/>
+        </p:spPr>
+        <p:txBody>
+          <a:bodyPr wrap="square" rtlCol="0">
+            <a:spAutoFit/>
+          </a:bodyPr>
+          <a:lstStyle/>
+          <a:p>
+            <a:r>
+              <a:rPr lang="en-US" sz="3000" b="1" dirty="0">
+                <a:latin typeface="Corbel" panose="020B0503020204020204" pitchFamily="34" charset="0"/>
+                <a:ea typeface="Lato" panose="020B0604020202020204" pitchFamily="34" charset="0"/>
+                <a:cs typeface="Helvetica" panose="020B0604020202020204" pitchFamily="34" charset="0"/>
+              </a:rPr>
+              <a:t>Bagging and boosting use under- and overfitting to get more performant models</a:t>
+            </a:r>
+            <a:endParaRPr lang="en-GB" sz="3000" b="1" dirty="0">
+              <a:latin typeface="Corbel" panose="020B0503020204020204" pitchFamily="34" charset="0"/>
+              <a:ea typeface="Lato" panose="020B0604020202020204" pitchFamily="34" charset="0"/>
+              <a:cs typeface="Helvetica" panose="020B0604020202020204" pitchFamily="34" charset="0"/>
+            </a:endParaRPr>
+          </a:p>
+        </p:txBody>
+      </p:sp>
+    </p:spTree>
+    <p:extLst>
+      <p:ext uri="{BB962C8B-B14F-4D97-AF65-F5344CB8AC3E}">
+        <p14:creationId xmlns:p14="http://schemas.microsoft.com/office/powerpoint/2010/main" val="3362643969"/>
+      </p:ext>
+    </p:extLst>
+  </p:cSld>
+  <p:clrMapOvr>
+    <a:masterClrMapping/>
+  </p:clrMapOvr>
+</p:sld>
+</file>
+
+<file path=ppt/slides/slide17.xml><?xml version="1.0" encoding="utf-8"?>
+<p:sld xmlns:a="http://schemas.openxmlformats.org/drawingml/2006/main" xmlns:r="http://schemas.openxmlformats.org/officeDocument/2006/relationships" xmlns:p="http://schemas.openxmlformats.org/presentationml/2006/main">
+  <p:cSld>
+    <p:spTree>
+      <p:nvGrpSpPr>
         <p:cNvPr id="1" name=""/>
         <p:cNvGrpSpPr/>
         <p:nvPr/>
@@ -6632,7 +7151,229 @@
 </p:sld>
 </file>
 
-<file path=ppt/slides/slide17.xml><?xml version="1.0" encoding="utf-8"?>
+<file path=ppt/slides/slide18.xml><?xml version="1.0" encoding="utf-8"?>
+<p:sld xmlns:a="http://schemas.openxmlformats.org/drawingml/2006/main" xmlns:r="http://schemas.openxmlformats.org/officeDocument/2006/relationships" xmlns:p="http://schemas.openxmlformats.org/presentationml/2006/main">
+  <p:cSld>
+    <p:spTree>
+      <p:nvGrpSpPr>
+        <p:cNvPr id="1" name="">
+          <a:extLst>
+            <a:ext uri="{FF2B5EF4-FFF2-40B4-BE49-F238E27FC236}">
+              <a16:creationId xmlns:a16="http://schemas.microsoft.com/office/drawing/2014/main" id="{33CE7657-3C44-627A-CF94-71AD6561F87A}"/>
+            </a:ext>
+          </a:extLst>
+        </p:cNvPr>
+        <p:cNvGrpSpPr/>
+        <p:nvPr/>
+      </p:nvGrpSpPr>
+      <p:grpSpPr>
+        <a:xfrm>
+          <a:off x="0" y="0"/>
+          <a:ext cx="0" cy="0"/>
+          <a:chOff x="0" y="0"/>
+          <a:chExt cx="0" cy="0"/>
+        </a:xfrm>
+      </p:grpSpPr>
+      <p:sp>
+        <p:nvSpPr>
+          <p:cNvPr id="3" name="TextBox 2">
+            <a:extLst>
+              <a:ext uri="{FF2B5EF4-FFF2-40B4-BE49-F238E27FC236}">
+                <a16:creationId xmlns:a16="http://schemas.microsoft.com/office/drawing/2014/main" id="{BDAD9CC4-185E-291B-758F-A6CA1DCC2CE9}"/>
+              </a:ext>
+            </a:extLst>
+          </p:cNvPr>
+          <p:cNvSpPr txBox="1"/>
+          <p:nvPr/>
+        </p:nvSpPr>
+        <p:spPr>
+          <a:xfrm>
+            <a:off x="241301" y="129804"/>
+            <a:ext cx="11747500" cy="553998"/>
+          </a:xfrm>
+          <a:prstGeom prst="rect">
+            <a:avLst/>
+          </a:prstGeom>
+          <a:noFill/>
+        </p:spPr>
+        <p:txBody>
+          <a:bodyPr wrap="square" rtlCol="0">
+            <a:spAutoFit/>
+          </a:bodyPr>
+          <a:lstStyle/>
+          <a:p>
+            <a:r>
+              <a:rPr lang="en-GB" sz="3000" b="1" dirty="0">
+                <a:latin typeface="Corbel" panose="020B0503020204020204" pitchFamily="34" charset="0"/>
+                <a:ea typeface="Lato" panose="020B0604020202020204" pitchFamily="34" charset="0"/>
+                <a:cs typeface="Helvetica" panose="020B0604020202020204" pitchFamily="34" charset="0"/>
+              </a:rPr>
+              <a:t>Random forest (top) compared to gradient boosting (bottom)</a:t>
+            </a:r>
+          </a:p>
+        </p:txBody>
+      </p:sp>
+      <p:pic>
+        <p:nvPicPr>
+          <p:cNvPr id="2" name="Picture 1">
+            <a:extLst>
+              <a:ext uri="{FF2B5EF4-FFF2-40B4-BE49-F238E27FC236}">
+                <a16:creationId xmlns:a16="http://schemas.microsoft.com/office/drawing/2014/main" id="{CFB25488-AFAB-8BFF-3A48-470EBB40B642}"/>
+              </a:ext>
+            </a:extLst>
+          </p:cNvPr>
+          <p:cNvPicPr>
+            <a:picLocks noChangeAspect="1"/>
+          </p:cNvPicPr>
+          <p:nvPr/>
+        </p:nvPicPr>
+        <p:blipFill>
+          <a:blip r:embed="rId3"/>
+          <a:srcRect l="16761" b="40455"/>
+          <a:stretch>
+            <a:fillRect/>
+          </a:stretch>
+        </p:blipFill>
+        <p:spPr>
+          <a:xfrm>
+            <a:off x="2274849" y="3652813"/>
+            <a:ext cx="7892053" cy="2713324"/>
+          </a:xfrm>
+          <a:prstGeom prst="rect">
+            <a:avLst/>
+          </a:prstGeom>
+        </p:spPr>
+      </p:pic>
+      <p:sp>
+        <p:nvSpPr>
+          <p:cNvPr id="4" name="Rectangle 3">
+            <a:extLst>
+              <a:ext uri="{FF2B5EF4-FFF2-40B4-BE49-F238E27FC236}">
+                <a16:creationId xmlns:a16="http://schemas.microsoft.com/office/drawing/2014/main" id="{D3F462D5-4AEC-DC39-E465-59FEAD527E22}"/>
+              </a:ext>
+            </a:extLst>
+          </p:cNvPr>
+          <p:cNvSpPr/>
+          <p:nvPr/>
+        </p:nvSpPr>
+        <p:spPr>
+          <a:xfrm>
+            <a:off x="1794469" y="6217593"/>
+            <a:ext cx="5262201" cy="510603"/>
+          </a:xfrm>
+          <a:prstGeom prst="rect">
+            <a:avLst/>
+          </a:prstGeom>
+          <a:solidFill>
+            <a:schemeClr val="bg1"/>
+          </a:solidFill>
+          <a:ln>
+            <a:solidFill>
+              <a:schemeClr val="bg1"/>
+            </a:solidFill>
+          </a:ln>
+        </p:spPr>
+        <p:style>
+          <a:lnRef idx="2">
+            <a:schemeClr val="accent1">
+              <a:shade val="15000"/>
+            </a:schemeClr>
+          </a:lnRef>
+          <a:fillRef idx="1">
+            <a:schemeClr val="accent1"/>
+          </a:fillRef>
+          <a:effectRef idx="0">
+            <a:schemeClr val="accent1"/>
+          </a:effectRef>
+          <a:fontRef idx="minor">
+            <a:schemeClr val="lt1"/>
+          </a:fontRef>
+        </p:style>
+        <p:txBody>
+          <a:bodyPr rtlCol="0" anchor="ctr"/>
+          <a:lstStyle/>
+          <a:p>
+            <a:pPr algn="ctr"/>
+            <a:endParaRPr lang="en-NL"/>
+          </a:p>
+        </p:txBody>
+      </p:sp>
+      <p:pic>
+        <p:nvPicPr>
+          <p:cNvPr id="8" name="Picture 7">
+            <a:extLst>
+              <a:ext uri="{FF2B5EF4-FFF2-40B4-BE49-F238E27FC236}">
+                <a16:creationId xmlns:a16="http://schemas.microsoft.com/office/drawing/2014/main" id="{117133CE-7EA9-56A2-4B58-4349BE3F85D4}"/>
+              </a:ext>
+            </a:extLst>
+          </p:cNvPr>
+          <p:cNvPicPr>
+            <a:picLocks noChangeAspect="1"/>
+          </p:cNvPicPr>
+          <p:nvPr/>
+        </p:nvPicPr>
+        <p:blipFill>
+          <a:blip r:embed="rId4"/>
+          <a:srcRect l="2064" t="6166" r="1895" b="20625"/>
+          <a:stretch>
+            <a:fillRect/>
+          </a:stretch>
+        </p:blipFill>
+        <p:spPr>
+          <a:xfrm>
+            <a:off x="1314451" y="836342"/>
+            <a:ext cx="9601200" cy="3267308"/>
+          </a:xfrm>
+          <a:prstGeom prst="rect">
+            <a:avLst/>
+          </a:prstGeom>
+        </p:spPr>
+      </p:pic>
+      <p:pic>
+        <p:nvPicPr>
+          <p:cNvPr id="12" name="Picture 11">
+            <a:extLst>
+              <a:ext uri="{FF2B5EF4-FFF2-40B4-BE49-F238E27FC236}">
+                <a16:creationId xmlns:a16="http://schemas.microsoft.com/office/drawing/2014/main" id="{451999A1-E0C9-5ABD-28E1-B2053FB0E5CE}"/>
+              </a:ext>
+            </a:extLst>
+          </p:cNvPr>
+          <p:cNvPicPr>
+            <a:picLocks noChangeAspect="1"/>
+          </p:cNvPicPr>
+          <p:nvPr/>
+        </p:nvPicPr>
+        <p:blipFill>
+          <a:blip r:embed="rId4"/>
+          <a:srcRect l="2064" t="6166" r="88329" b="20625"/>
+          <a:stretch>
+            <a:fillRect/>
+          </a:stretch>
+        </p:blipFill>
+        <p:spPr>
+          <a:xfrm>
+            <a:off x="1314451" y="3552454"/>
+            <a:ext cx="960398" cy="3267308"/>
+          </a:xfrm>
+          <a:prstGeom prst="rect">
+            <a:avLst/>
+          </a:prstGeom>
+        </p:spPr>
+      </p:pic>
+    </p:spTree>
+    <p:extLst>
+      <p:ext uri="{BB962C8B-B14F-4D97-AF65-F5344CB8AC3E}">
+        <p14:creationId xmlns:p14="http://schemas.microsoft.com/office/powerpoint/2010/main" val="4145882378"/>
+      </p:ext>
+    </p:extLst>
+  </p:cSld>
+  <p:clrMapOvr>
+    <a:masterClrMapping/>
+  </p:clrMapOvr>
+</p:sld>
+</file>
+
+<file path=ppt/slides/slide19.xml><?xml version="1.0" encoding="utf-8"?>
 <p:sld xmlns:a="http://schemas.openxmlformats.org/drawingml/2006/main" xmlns:r="http://schemas.openxmlformats.org/officeDocument/2006/relationships" xmlns:p="http://schemas.openxmlformats.org/presentationml/2006/main">
   <p:cSld>
     <p:spTree>
